--- a/tests/corpus/pptx/generated/text-more.pptx
+++ b/tests/corpus/pptx/generated/text-more.pptx
@@ -8,6 +8,10 @@
     <p:sldId id="256" r:id="rId2"/>
     <p:sldId id="257" r:id="rId3"/>
     <p:sldId id="258" r:id="rId4"/>
+    <p:sldId id="259" r:id="rId5"/>
+    <p:sldId id="260" r:id="rId6"/>
+    <p:sldId id="261" r:id="rId7"/>
+    <p:sldId id="262" r:id="rId8"/>
   </p:sldIdLst>
   <p:sldSz cx="12192000" cy="6858000"/>
   <p:notesSz cx="6858000" cy="9144000"/>
@@ -131,7 +135,7 @@
           <p:cNvPr id="2" name="Titel 1">
             <a:extLst>
               <a:ext uri="{FF2B5EF4-FFF2-40B4-BE49-F238E27FC236}">
-                <a16:creationId xmlns:a16="http://schemas.microsoft.com/office/drawing/2014/main" id="{68FC1FB2-4CFF-3CD1-9526-C9293B673BEE}"/>
+                <a16:creationId xmlns:a16="http://schemas.microsoft.com/office/drawing/2014/main" id="{6B3BD4BC-9D93-36E5-07EB-9C1FA781158D}"/>
               </a:ext>
             </a:extLst>
           </p:cNvPr>
@@ -168,7 +172,7 @@
           <p:cNvPr id="3" name="Untertitel 2">
             <a:extLst>
               <a:ext uri="{FF2B5EF4-FFF2-40B4-BE49-F238E27FC236}">
-                <a16:creationId xmlns:a16="http://schemas.microsoft.com/office/drawing/2014/main" id="{ED823B84-CBE9-ECB8-BC8B-C50D4E77CF67}"/>
+                <a16:creationId xmlns:a16="http://schemas.microsoft.com/office/drawing/2014/main" id="{2F2F367A-FF8A-74F9-D1E3-30CF6E037886}"/>
               </a:ext>
             </a:extLst>
           </p:cNvPr>
@@ -238,7 +242,7 @@
           <p:cNvPr id="4" name="Datumsplatzhalter 3">
             <a:extLst>
               <a:ext uri="{FF2B5EF4-FFF2-40B4-BE49-F238E27FC236}">
-                <a16:creationId xmlns:a16="http://schemas.microsoft.com/office/drawing/2014/main" id="{6676C1AB-EF4D-6615-6101-D0BE7460C51D}"/>
+                <a16:creationId xmlns:a16="http://schemas.microsoft.com/office/drawing/2014/main" id="{BE96B119-9E03-1B66-22B1-24D0D5E23A0F}"/>
               </a:ext>
             </a:extLst>
           </p:cNvPr>
@@ -254,9 +258,9 @@
           <a:bodyPr/>
           <a:lstStyle/>
           <a:p>
-            <a:fld id="{A9EFEAB8-244A-4AB0-A984-D44E92764FF7}" type="datetimeFigureOut">
+            <a:fld id="{0FDCCD1D-F1EA-4304-9187-62589EACD3D0}" type="datetimeFigureOut">
               <a:rPr lang="de-DE" smtClean="0"/>
-              <a:t>09.10.2026</a:t>
+              <a:t>10.10.2026</a:t>
             </a:fld>
             <a:endParaRPr lang="de-DE"/>
           </a:p>
@@ -267,7 +271,7 @@
           <p:cNvPr id="5" name="Fußzeilenplatzhalter 4">
             <a:extLst>
               <a:ext uri="{FF2B5EF4-FFF2-40B4-BE49-F238E27FC236}">
-                <a16:creationId xmlns:a16="http://schemas.microsoft.com/office/drawing/2014/main" id="{CEA5497C-A9F9-9720-FD2D-AF9351CF5030}"/>
+                <a16:creationId xmlns:a16="http://schemas.microsoft.com/office/drawing/2014/main" id="{FCDD682E-2D61-664F-9706-DC32E71EEC3C}"/>
               </a:ext>
             </a:extLst>
           </p:cNvPr>
@@ -292,7 +296,7 @@
           <p:cNvPr id="6" name="Foliennummernplatzhalter 5">
             <a:extLst>
               <a:ext uri="{FF2B5EF4-FFF2-40B4-BE49-F238E27FC236}">
-                <a16:creationId xmlns:a16="http://schemas.microsoft.com/office/drawing/2014/main" id="{01886439-2FC0-1C23-89D0-477DE0E89656}"/>
+                <a16:creationId xmlns:a16="http://schemas.microsoft.com/office/drawing/2014/main" id="{C3583EA9-653E-7CC1-F197-D34F7EC85E04}"/>
               </a:ext>
             </a:extLst>
           </p:cNvPr>
@@ -308,7 +312,7 @@
           <a:bodyPr/>
           <a:lstStyle/>
           <a:p>
-            <a:fld id="{72B1D644-1C8C-4C9D-91C8-47B36D207CD5}" type="slidenum">
+            <a:fld id="{88063640-3A8E-482B-98FA-57CF740BEB7B}" type="slidenum">
               <a:rPr lang="de-DE" smtClean="0"/>
               <a:t>‹Nr.›</a:t>
             </a:fld>
@@ -319,7 +323,7 @@
     </p:spTree>
     <p:extLst>
       <p:ext uri="{BB962C8B-B14F-4D97-AF65-F5344CB8AC3E}">
-        <p14:creationId xmlns:p14="http://schemas.microsoft.com/office/powerpoint/2010/main" val="1556600373"/>
+        <p14:creationId xmlns:p14="http://schemas.microsoft.com/office/powerpoint/2010/main" val="533650542"/>
       </p:ext>
     </p:extLst>
   </p:cSld>
@@ -351,7 +355,7 @@
           <p:cNvPr id="2" name="Titel 1">
             <a:extLst>
               <a:ext uri="{FF2B5EF4-FFF2-40B4-BE49-F238E27FC236}">
-                <a16:creationId xmlns:a16="http://schemas.microsoft.com/office/drawing/2014/main" id="{E9725C4B-8065-6EF7-D2B3-7E47A0DF8BCD}"/>
+                <a16:creationId xmlns:a16="http://schemas.microsoft.com/office/drawing/2014/main" id="{40E0FE0D-798E-DDBF-D6B8-0FD9D60DE914}"/>
               </a:ext>
             </a:extLst>
           </p:cNvPr>
@@ -379,7 +383,7 @@
           <p:cNvPr id="3" name="Vertikaler Textplatzhalter 2">
             <a:extLst>
               <a:ext uri="{FF2B5EF4-FFF2-40B4-BE49-F238E27FC236}">
-                <a16:creationId xmlns:a16="http://schemas.microsoft.com/office/drawing/2014/main" id="{1A5A43AE-A284-15B4-064D-7804EDB26034}"/>
+                <a16:creationId xmlns:a16="http://schemas.microsoft.com/office/drawing/2014/main" id="{37077DF5-A62D-3903-69D3-C4C3910AD1D3}"/>
               </a:ext>
             </a:extLst>
           </p:cNvPr>
@@ -436,7 +440,7 @@
           <p:cNvPr id="4" name="Datumsplatzhalter 3">
             <a:extLst>
               <a:ext uri="{FF2B5EF4-FFF2-40B4-BE49-F238E27FC236}">
-                <a16:creationId xmlns:a16="http://schemas.microsoft.com/office/drawing/2014/main" id="{A9188331-3716-0EF9-F276-210102292426}"/>
+                <a16:creationId xmlns:a16="http://schemas.microsoft.com/office/drawing/2014/main" id="{F4DA3DF5-22C4-3739-ED05-7AB4CD771FF1}"/>
               </a:ext>
             </a:extLst>
           </p:cNvPr>
@@ -452,9 +456,9 @@
           <a:bodyPr/>
           <a:lstStyle/>
           <a:p>
-            <a:fld id="{A9EFEAB8-244A-4AB0-A984-D44E92764FF7}" type="datetimeFigureOut">
+            <a:fld id="{0FDCCD1D-F1EA-4304-9187-62589EACD3D0}" type="datetimeFigureOut">
               <a:rPr lang="de-DE" smtClean="0"/>
-              <a:t>09.10.2026</a:t>
+              <a:t>10.10.2026</a:t>
             </a:fld>
             <a:endParaRPr lang="de-DE"/>
           </a:p>
@@ -465,7 +469,7 @@
           <p:cNvPr id="5" name="Fußzeilenplatzhalter 4">
             <a:extLst>
               <a:ext uri="{FF2B5EF4-FFF2-40B4-BE49-F238E27FC236}">
-                <a16:creationId xmlns:a16="http://schemas.microsoft.com/office/drawing/2014/main" id="{22F96CE5-10D6-E026-5141-51DFD69E8DBB}"/>
+                <a16:creationId xmlns:a16="http://schemas.microsoft.com/office/drawing/2014/main" id="{B93CF245-59C2-6F8B-AF5F-A03B125C866B}"/>
               </a:ext>
             </a:extLst>
           </p:cNvPr>
@@ -490,7 +494,7 @@
           <p:cNvPr id="6" name="Foliennummernplatzhalter 5">
             <a:extLst>
               <a:ext uri="{FF2B5EF4-FFF2-40B4-BE49-F238E27FC236}">
-                <a16:creationId xmlns:a16="http://schemas.microsoft.com/office/drawing/2014/main" id="{06AA4104-7FAE-00EB-18FD-01CC9B712C4C}"/>
+                <a16:creationId xmlns:a16="http://schemas.microsoft.com/office/drawing/2014/main" id="{DA4639A4-E055-446F-76DD-6E2A0E177566}"/>
               </a:ext>
             </a:extLst>
           </p:cNvPr>
@@ -506,7 +510,7 @@
           <a:bodyPr/>
           <a:lstStyle/>
           <a:p>
-            <a:fld id="{72B1D644-1C8C-4C9D-91C8-47B36D207CD5}" type="slidenum">
+            <a:fld id="{88063640-3A8E-482B-98FA-57CF740BEB7B}" type="slidenum">
               <a:rPr lang="de-DE" smtClean="0"/>
               <a:t>‹Nr.›</a:t>
             </a:fld>
@@ -517,7 +521,7 @@
     </p:spTree>
     <p:extLst>
       <p:ext uri="{BB962C8B-B14F-4D97-AF65-F5344CB8AC3E}">
-        <p14:creationId xmlns:p14="http://schemas.microsoft.com/office/powerpoint/2010/main" val="3220634329"/>
+        <p14:creationId xmlns:p14="http://schemas.microsoft.com/office/powerpoint/2010/main" val="2294695253"/>
       </p:ext>
     </p:extLst>
   </p:cSld>
@@ -549,7 +553,7 @@
           <p:cNvPr id="2" name="Vertikaler Titel 1">
             <a:extLst>
               <a:ext uri="{FF2B5EF4-FFF2-40B4-BE49-F238E27FC236}">
-                <a16:creationId xmlns:a16="http://schemas.microsoft.com/office/drawing/2014/main" id="{ED005FBE-138E-ED58-746E-B2914B018D44}"/>
+                <a16:creationId xmlns:a16="http://schemas.microsoft.com/office/drawing/2014/main" id="{30F5B7BA-B293-70D9-6281-E570A73D0FE9}"/>
               </a:ext>
             </a:extLst>
           </p:cNvPr>
@@ -582,7 +586,7 @@
           <p:cNvPr id="3" name="Vertikaler Textplatzhalter 2">
             <a:extLst>
               <a:ext uri="{FF2B5EF4-FFF2-40B4-BE49-F238E27FC236}">
-                <a16:creationId xmlns:a16="http://schemas.microsoft.com/office/drawing/2014/main" id="{84BD09E7-103B-9CB5-4218-D0D1E190DE9B}"/>
+                <a16:creationId xmlns:a16="http://schemas.microsoft.com/office/drawing/2014/main" id="{540CCF6B-6377-019A-9441-49243A2BFD7A}"/>
               </a:ext>
             </a:extLst>
           </p:cNvPr>
@@ -644,7 +648,7 @@
           <p:cNvPr id="4" name="Datumsplatzhalter 3">
             <a:extLst>
               <a:ext uri="{FF2B5EF4-FFF2-40B4-BE49-F238E27FC236}">
-                <a16:creationId xmlns:a16="http://schemas.microsoft.com/office/drawing/2014/main" id="{B86356D5-03F1-425A-0F47-E4BD2C52A657}"/>
+                <a16:creationId xmlns:a16="http://schemas.microsoft.com/office/drawing/2014/main" id="{65B40D7A-29B3-79BA-7438-A20F2C34B79B}"/>
               </a:ext>
             </a:extLst>
           </p:cNvPr>
@@ -660,9 +664,9 @@
           <a:bodyPr/>
           <a:lstStyle/>
           <a:p>
-            <a:fld id="{A9EFEAB8-244A-4AB0-A984-D44E92764FF7}" type="datetimeFigureOut">
+            <a:fld id="{0FDCCD1D-F1EA-4304-9187-62589EACD3D0}" type="datetimeFigureOut">
               <a:rPr lang="de-DE" smtClean="0"/>
-              <a:t>09.10.2026</a:t>
+              <a:t>10.10.2026</a:t>
             </a:fld>
             <a:endParaRPr lang="de-DE"/>
           </a:p>
@@ -673,7 +677,7 @@
           <p:cNvPr id="5" name="Fußzeilenplatzhalter 4">
             <a:extLst>
               <a:ext uri="{FF2B5EF4-FFF2-40B4-BE49-F238E27FC236}">
-                <a16:creationId xmlns:a16="http://schemas.microsoft.com/office/drawing/2014/main" id="{DAA2A757-C0BF-BFFF-9312-F5EC1AE29144}"/>
+                <a16:creationId xmlns:a16="http://schemas.microsoft.com/office/drawing/2014/main" id="{3568C52F-89AC-B697-B946-3193F6156243}"/>
               </a:ext>
             </a:extLst>
           </p:cNvPr>
@@ -698,7 +702,7 @@
           <p:cNvPr id="6" name="Foliennummernplatzhalter 5">
             <a:extLst>
               <a:ext uri="{FF2B5EF4-FFF2-40B4-BE49-F238E27FC236}">
-                <a16:creationId xmlns:a16="http://schemas.microsoft.com/office/drawing/2014/main" id="{6EC17D0D-B99E-73FD-44A6-D8F4D467131B}"/>
+                <a16:creationId xmlns:a16="http://schemas.microsoft.com/office/drawing/2014/main" id="{B5944170-1CBE-25B5-E75D-156F4502B253}"/>
               </a:ext>
             </a:extLst>
           </p:cNvPr>
@@ -714,7 +718,7 @@
           <a:bodyPr/>
           <a:lstStyle/>
           <a:p>
-            <a:fld id="{72B1D644-1C8C-4C9D-91C8-47B36D207CD5}" type="slidenum">
+            <a:fld id="{88063640-3A8E-482B-98FA-57CF740BEB7B}" type="slidenum">
               <a:rPr lang="de-DE" smtClean="0"/>
               <a:t>‹Nr.›</a:t>
             </a:fld>
@@ -725,7 +729,7 @@
     </p:spTree>
     <p:extLst>
       <p:ext uri="{BB962C8B-B14F-4D97-AF65-F5344CB8AC3E}">
-        <p14:creationId xmlns:p14="http://schemas.microsoft.com/office/powerpoint/2010/main" val="1159363170"/>
+        <p14:creationId xmlns:p14="http://schemas.microsoft.com/office/powerpoint/2010/main" val="2403689175"/>
       </p:ext>
     </p:extLst>
   </p:cSld>
@@ -757,7 +761,7 @@
           <p:cNvPr id="2" name="Titel 1">
             <a:extLst>
               <a:ext uri="{FF2B5EF4-FFF2-40B4-BE49-F238E27FC236}">
-                <a16:creationId xmlns:a16="http://schemas.microsoft.com/office/drawing/2014/main" id="{A4B76E53-F2DF-1AEB-AF50-0B9DB69E2D82}"/>
+                <a16:creationId xmlns:a16="http://schemas.microsoft.com/office/drawing/2014/main" id="{B7CDE480-06C4-CFDE-1B0A-6824C7E2C5A4}"/>
               </a:ext>
             </a:extLst>
           </p:cNvPr>
@@ -785,7 +789,7 @@
           <p:cNvPr id="3" name="Inhaltsplatzhalter 2">
             <a:extLst>
               <a:ext uri="{FF2B5EF4-FFF2-40B4-BE49-F238E27FC236}">
-                <a16:creationId xmlns:a16="http://schemas.microsoft.com/office/drawing/2014/main" id="{273B8D16-CCC7-AD16-887E-48225389811A}"/>
+                <a16:creationId xmlns:a16="http://schemas.microsoft.com/office/drawing/2014/main" id="{CA57CC3C-D6CA-3110-A25E-AFEBBDE3FCFD}"/>
               </a:ext>
             </a:extLst>
           </p:cNvPr>
@@ -842,7 +846,7 @@
           <p:cNvPr id="4" name="Datumsplatzhalter 3">
             <a:extLst>
               <a:ext uri="{FF2B5EF4-FFF2-40B4-BE49-F238E27FC236}">
-                <a16:creationId xmlns:a16="http://schemas.microsoft.com/office/drawing/2014/main" id="{7FC3AE11-1F80-D0AB-A28C-AB7A804A22E2}"/>
+                <a16:creationId xmlns:a16="http://schemas.microsoft.com/office/drawing/2014/main" id="{30EF6327-2779-3A8B-8386-1F0E567AB7CD}"/>
               </a:ext>
             </a:extLst>
           </p:cNvPr>
@@ -858,9 +862,9 @@
           <a:bodyPr/>
           <a:lstStyle/>
           <a:p>
-            <a:fld id="{A9EFEAB8-244A-4AB0-A984-D44E92764FF7}" type="datetimeFigureOut">
+            <a:fld id="{0FDCCD1D-F1EA-4304-9187-62589EACD3D0}" type="datetimeFigureOut">
               <a:rPr lang="de-DE" smtClean="0"/>
-              <a:t>09.10.2026</a:t>
+              <a:t>10.10.2026</a:t>
             </a:fld>
             <a:endParaRPr lang="de-DE"/>
           </a:p>
@@ -871,7 +875,7 @@
           <p:cNvPr id="5" name="Fußzeilenplatzhalter 4">
             <a:extLst>
               <a:ext uri="{FF2B5EF4-FFF2-40B4-BE49-F238E27FC236}">
-                <a16:creationId xmlns:a16="http://schemas.microsoft.com/office/drawing/2014/main" id="{7E4EF5CB-7ECC-CC5A-2F37-1A935D676BE6}"/>
+                <a16:creationId xmlns:a16="http://schemas.microsoft.com/office/drawing/2014/main" id="{273BC452-3C3D-57F2-3E12-BD075E086740}"/>
               </a:ext>
             </a:extLst>
           </p:cNvPr>
@@ -896,7 +900,7 @@
           <p:cNvPr id="6" name="Foliennummernplatzhalter 5">
             <a:extLst>
               <a:ext uri="{FF2B5EF4-FFF2-40B4-BE49-F238E27FC236}">
-                <a16:creationId xmlns:a16="http://schemas.microsoft.com/office/drawing/2014/main" id="{2E4C2EFA-5E75-EDD9-D7A5-EA6AEFEEB586}"/>
+                <a16:creationId xmlns:a16="http://schemas.microsoft.com/office/drawing/2014/main" id="{1677BAE0-5372-BD32-AE1E-667C12107C64}"/>
               </a:ext>
             </a:extLst>
           </p:cNvPr>
@@ -912,7 +916,7 @@
           <a:bodyPr/>
           <a:lstStyle/>
           <a:p>
-            <a:fld id="{72B1D644-1C8C-4C9D-91C8-47B36D207CD5}" type="slidenum">
+            <a:fld id="{88063640-3A8E-482B-98FA-57CF740BEB7B}" type="slidenum">
               <a:rPr lang="de-DE" smtClean="0"/>
               <a:t>‹Nr.›</a:t>
             </a:fld>
@@ -923,7 +927,7 @@
     </p:spTree>
     <p:extLst>
       <p:ext uri="{BB962C8B-B14F-4D97-AF65-F5344CB8AC3E}">
-        <p14:creationId xmlns:p14="http://schemas.microsoft.com/office/powerpoint/2010/main" val="2004794739"/>
+        <p14:creationId xmlns:p14="http://schemas.microsoft.com/office/powerpoint/2010/main" val="2474709703"/>
       </p:ext>
     </p:extLst>
   </p:cSld>
@@ -955,7 +959,7 @@
           <p:cNvPr id="2" name="Titel 1">
             <a:extLst>
               <a:ext uri="{FF2B5EF4-FFF2-40B4-BE49-F238E27FC236}">
-                <a16:creationId xmlns:a16="http://schemas.microsoft.com/office/drawing/2014/main" id="{D98C00F5-702A-D312-9AF0-AAAB5BBA44F9}"/>
+                <a16:creationId xmlns:a16="http://schemas.microsoft.com/office/drawing/2014/main" id="{35A57B2E-00F7-93B4-4E6E-5B4EFFDDA672}"/>
               </a:ext>
             </a:extLst>
           </p:cNvPr>
@@ -992,7 +996,7 @@
           <p:cNvPr id="3" name="Textplatzhalter 2">
             <a:extLst>
               <a:ext uri="{FF2B5EF4-FFF2-40B4-BE49-F238E27FC236}">
-                <a16:creationId xmlns:a16="http://schemas.microsoft.com/office/drawing/2014/main" id="{848896E3-5766-3F2F-06BC-763F7691ECE8}"/>
+                <a16:creationId xmlns:a16="http://schemas.microsoft.com/office/drawing/2014/main" id="{ACB7287D-50CF-3D31-ADDB-28F34250B344}"/>
               </a:ext>
             </a:extLst>
           </p:cNvPr>
@@ -1117,7 +1121,7 @@
           <p:cNvPr id="4" name="Datumsplatzhalter 3">
             <a:extLst>
               <a:ext uri="{FF2B5EF4-FFF2-40B4-BE49-F238E27FC236}">
-                <a16:creationId xmlns:a16="http://schemas.microsoft.com/office/drawing/2014/main" id="{0C0C2BEF-2D30-7CF9-9F10-49362B8962A6}"/>
+                <a16:creationId xmlns:a16="http://schemas.microsoft.com/office/drawing/2014/main" id="{E47C5637-97E8-E901-6A02-E0D19E3BAC12}"/>
               </a:ext>
             </a:extLst>
           </p:cNvPr>
@@ -1133,9 +1137,9 @@
           <a:bodyPr/>
           <a:lstStyle/>
           <a:p>
-            <a:fld id="{A9EFEAB8-244A-4AB0-A984-D44E92764FF7}" type="datetimeFigureOut">
+            <a:fld id="{0FDCCD1D-F1EA-4304-9187-62589EACD3D0}" type="datetimeFigureOut">
               <a:rPr lang="de-DE" smtClean="0"/>
-              <a:t>09.10.2026</a:t>
+              <a:t>10.10.2026</a:t>
             </a:fld>
             <a:endParaRPr lang="de-DE"/>
           </a:p>
@@ -1146,7 +1150,7 @@
           <p:cNvPr id="5" name="Fußzeilenplatzhalter 4">
             <a:extLst>
               <a:ext uri="{FF2B5EF4-FFF2-40B4-BE49-F238E27FC236}">
-                <a16:creationId xmlns:a16="http://schemas.microsoft.com/office/drawing/2014/main" id="{EA4C6FEC-1A7D-DBD1-AD43-3750851EB8EA}"/>
+                <a16:creationId xmlns:a16="http://schemas.microsoft.com/office/drawing/2014/main" id="{A2971A10-D426-8EEE-DFFC-2462AE7F7CC0}"/>
               </a:ext>
             </a:extLst>
           </p:cNvPr>
@@ -1171,7 +1175,7 @@
           <p:cNvPr id="6" name="Foliennummernplatzhalter 5">
             <a:extLst>
               <a:ext uri="{FF2B5EF4-FFF2-40B4-BE49-F238E27FC236}">
-                <a16:creationId xmlns:a16="http://schemas.microsoft.com/office/drawing/2014/main" id="{1F8D1034-6936-2CEB-9725-DB0FDBAE2680}"/>
+                <a16:creationId xmlns:a16="http://schemas.microsoft.com/office/drawing/2014/main" id="{8B7DF1D1-50B6-D2AB-4F40-CEDEDC43812A}"/>
               </a:ext>
             </a:extLst>
           </p:cNvPr>
@@ -1187,7 +1191,7 @@
           <a:bodyPr/>
           <a:lstStyle/>
           <a:p>
-            <a:fld id="{72B1D644-1C8C-4C9D-91C8-47B36D207CD5}" type="slidenum">
+            <a:fld id="{88063640-3A8E-482B-98FA-57CF740BEB7B}" type="slidenum">
               <a:rPr lang="de-DE" smtClean="0"/>
               <a:t>‹Nr.›</a:t>
             </a:fld>
@@ -1198,7 +1202,7 @@
     </p:spTree>
     <p:extLst>
       <p:ext uri="{BB962C8B-B14F-4D97-AF65-F5344CB8AC3E}">
-        <p14:creationId xmlns:p14="http://schemas.microsoft.com/office/powerpoint/2010/main" val="319255027"/>
+        <p14:creationId xmlns:p14="http://schemas.microsoft.com/office/powerpoint/2010/main" val="3336073451"/>
       </p:ext>
     </p:extLst>
   </p:cSld>
@@ -1230,7 +1234,7 @@
           <p:cNvPr id="2" name="Titel 1">
             <a:extLst>
               <a:ext uri="{FF2B5EF4-FFF2-40B4-BE49-F238E27FC236}">
-                <a16:creationId xmlns:a16="http://schemas.microsoft.com/office/drawing/2014/main" id="{2D8FDA30-1A81-CCF4-AADA-FC0BFFAF1999}"/>
+                <a16:creationId xmlns:a16="http://schemas.microsoft.com/office/drawing/2014/main" id="{1C1C4D9D-D7C9-F158-1AF1-3CB900689296}"/>
               </a:ext>
             </a:extLst>
           </p:cNvPr>
@@ -1258,7 +1262,7 @@
           <p:cNvPr id="3" name="Inhaltsplatzhalter 2">
             <a:extLst>
               <a:ext uri="{FF2B5EF4-FFF2-40B4-BE49-F238E27FC236}">
-                <a16:creationId xmlns:a16="http://schemas.microsoft.com/office/drawing/2014/main" id="{A63CF407-8077-E566-312C-6CB1712E67CF}"/>
+                <a16:creationId xmlns:a16="http://schemas.microsoft.com/office/drawing/2014/main" id="{5DD78AE4-9101-DECF-2DBE-ED75A91AEC3F}"/>
               </a:ext>
             </a:extLst>
           </p:cNvPr>
@@ -1320,7 +1324,7 @@
           <p:cNvPr id="4" name="Inhaltsplatzhalter 3">
             <a:extLst>
               <a:ext uri="{FF2B5EF4-FFF2-40B4-BE49-F238E27FC236}">
-                <a16:creationId xmlns:a16="http://schemas.microsoft.com/office/drawing/2014/main" id="{7622027B-3F1A-FFB2-C9E1-29024C782081}"/>
+                <a16:creationId xmlns:a16="http://schemas.microsoft.com/office/drawing/2014/main" id="{D9E1502E-5F97-0986-7F5B-9F2C772AFB9C}"/>
               </a:ext>
             </a:extLst>
           </p:cNvPr>
@@ -1382,7 +1386,7 @@
           <p:cNvPr id="5" name="Datumsplatzhalter 4">
             <a:extLst>
               <a:ext uri="{FF2B5EF4-FFF2-40B4-BE49-F238E27FC236}">
-                <a16:creationId xmlns:a16="http://schemas.microsoft.com/office/drawing/2014/main" id="{F7D7AE7B-1D17-C06F-76B3-13D902AF0D00}"/>
+                <a16:creationId xmlns:a16="http://schemas.microsoft.com/office/drawing/2014/main" id="{E81799F0-C331-8694-829A-D1EFFF276B24}"/>
               </a:ext>
             </a:extLst>
           </p:cNvPr>
@@ -1398,9 +1402,9 @@
           <a:bodyPr/>
           <a:lstStyle/>
           <a:p>
-            <a:fld id="{A9EFEAB8-244A-4AB0-A984-D44E92764FF7}" type="datetimeFigureOut">
+            <a:fld id="{0FDCCD1D-F1EA-4304-9187-62589EACD3D0}" type="datetimeFigureOut">
               <a:rPr lang="de-DE" smtClean="0"/>
-              <a:t>09.10.2026</a:t>
+              <a:t>10.10.2026</a:t>
             </a:fld>
             <a:endParaRPr lang="de-DE"/>
           </a:p>
@@ -1411,7 +1415,7 @@
           <p:cNvPr id="6" name="Fußzeilenplatzhalter 5">
             <a:extLst>
               <a:ext uri="{FF2B5EF4-FFF2-40B4-BE49-F238E27FC236}">
-                <a16:creationId xmlns:a16="http://schemas.microsoft.com/office/drawing/2014/main" id="{E19EC7C9-E15E-7AA5-965D-A3E7C61D9476}"/>
+                <a16:creationId xmlns:a16="http://schemas.microsoft.com/office/drawing/2014/main" id="{FCD92EC9-7780-5A45-1D7C-3B08F7BBFE6A}"/>
               </a:ext>
             </a:extLst>
           </p:cNvPr>
@@ -1436,7 +1440,7 @@
           <p:cNvPr id="7" name="Foliennummernplatzhalter 6">
             <a:extLst>
               <a:ext uri="{FF2B5EF4-FFF2-40B4-BE49-F238E27FC236}">
-                <a16:creationId xmlns:a16="http://schemas.microsoft.com/office/drawing/2014/main" id="{4F7AED07-F495-B396-FF9F-E731FF49F653}"/>
+                <a16:creationId xmlns:a16="http://schemas.microsoft.com/office/drawing/2014/main" id="{83C2F9DE-57DE-54E1-172F-E2B36284620D}"/>
               </a:ext>
             </a:extLst>
           </p:cNvPr>
@@ -1452,7 +1456,7 @@
           <a:bodyPr/>
           <a:lstStyle/>
           <a:p>
-            <a:fld id="{72B1D644-1C8C-4C9D-91C8-47B36D207CD5}" type="slidenum">
+            <a:fld id="{88063640-3A8E-482B-98FA-57CF740BEB7B}" type="slidenum">
               <a:rPr lang="de-DE" smtClean="0"/>
               <a:t>‹Nr.›</a:t>
             </a:fld>
@@ -1463,7 +1467,7 @@
     </p:spTree>
     <p:extLst>
       <p:ext uri="{BB962C8B-B14F-4D97-AF65-F5344CB8AC3E}">
-        <p14:creationId xmlns:p14="http://schemas.microsoft.com/office/powerpoint/2010/main" val="3445290015"/>
+        <p14:creationId xmlns:p14="http://schemas.microsoft.com/office/powerpoint/2010/main" val="944122798"/>
       </p:ext>
     </p:extLst>
   </p:cSld>
@@ -1495,7 +1499,7 @@
           <p:cNvPr id="2" name="Titel 1">
             <a:extLst>
               <a:ext uri="{FF2B5EF4-FFF2-40B4-BE49-F238E27FC236}">
-                <a16:creationId xmlns:a16="http://schemas.microsoft.com/office/drawing/2014/main" id="{903907B7-2331-01D8-BCD5-5968A99D1F58}"/>
+                <a16:creationId xmlns:a16="http://schemas.microsoft.com/office/drawing/2014/main" id="{7941C0D5-8F6F-BDAF-F693-1DEEBE9F88A4}"/>
               </a:ext>
             </a:extLst>
           </p:cNvPr>
@@ -1528,7 +1532,7 @@
           <p:cNvPr id="3" name="Textplatzhalter 2">
             <a:extLst>
               <a:ext uri="{FF2B5EF4-FFF2-40B4-BE49-F238E27FC236}">
-                <a16:creationId xmlns:a16="http://schemas.microsoft.com/office/drawing/2014/main" id="{795A306F-FB3A-F7C7-16DD-44AF22AE0379}"/>
+                <a16:creationId xmlns:a16="http://schemas.microsoft.com/office/drawing/2014/main" id="{260326B9-F46A-2B12-8566-AA8DEFC299D1}"/>
               </a:ext>
             </a:extLst>
           </p:cNvPr>
@@ -1599,7 +1603,7 @@
           <p:cNvPr id="4" name="Inhaltsplatzhalter 3">
             <a:extLst>
               <a:ext uri="{FF2B5EF4-FFF2-40B4-BE49-F238E27FC236}">
-                <a16:creationId xmlns:a16="http://schemas.microsoft.com/office/drawing/2014/main" id="{8C1A3858-330A-DCBB-1A5E-168A8861B478}"/>
+                <a16:creationId xmlns:a16="http://schemas.microsoft.com/office/drawing/2014/main" id="{40E745BE-A4A0-144A-837C-45B83771F6AC}"/>
               </a:ext>
             </a:extLst>
           </p:cNvPr>
@@ -1661,7 +1665,7 @@
           <p:cNvPr id="5" name="Textplatzhalter 4">
             <a:extLst>
               <a:ext uri="{FF2B5EF4-FFF2-40B4-BE49-F238E27FC236}">
-                <a16:creationId xmlns:a16="http://schemas.microsoft.com/office/drawing/2014/main" id="{D759451E-05A3-7FF2-9EE8-5072CCE516D2}"/>
+                <a16:creationId xmlns:a16="http://schemas.microsoft.com/office/drawing/2014/main" id="{CCF28EC7-8B29-19AF-F8C3-6BE5E5B483A7}"/>
               </a:ext>
             </a:extLst>
           </p:cNvPr>
@@ -1732,7 +1736,7 @@
           <p:cNvPr id="6" name="Inhaltsplatzhalter 5">
             <a:extLst>
               <a:ext uri="{FF2B5EF4-FFF2-40B4-BE49-F238E27FC236}">
-                <a16:creationId xmlns:a16="http://schemas.microsoft.com/office/drawing/2014/main" id="{549B7C90-E191-A1D2-7EEB-13C2913D9470}"/>
+                <a16:creationId xmlns:a16="http://schemas.microsoft.com/office/drawing/2014/main" id="{64463F4E-DF34-A134-91F9-80D31D49E673}"/>
               </a:ext>
             </a:extLst>
           </p:cNvPr>
@@ -1794,7 +1798,7 @@
           <p:cNvPr id="7" name="Datumsplatzhalter 6">
             <a:extLst>
               <a:ext uri="{FF2B5EF4-FFF2-40B4-BE49-F238E27FC236}">
-                <a16:creationId xmlns:a16="http://schemas.microsoft.com/office/drawing/2014/main" id="{D6D4E6D6-C248-074B-4765-AF3529A908CE}"/>
+                <a16:creationId xmlns:a16="http://schemas.microsoft.com/office/drawing/2014/main" id="{36F02071-0F64-BFD2-03CB-31A84947ED27}"/>
               </a:ext>
             </a:extLst>
           </p:cNvPr>
@@ -1810,9 +1814,9 @@
           <a:bodyPr/>
           <a:lstStyle/>
           <a:p>
-            <a:fld id="{A9EFEAB8-244A-4AB0-A984-D44E92764FF7}" type="datetimeFigureOut">
+            <a:fld id="{0FDCCD1D-F1EA-4304-9187-62589EACD3D0}" type="datetimeFigureOut">
               <a:rPr lang="de-DE" smtClean="0"/>
-              <a:t>09.10.2026</a:t>
+              <a:t>10.10.2026</a:t>
             </a:fld>
             <a:endParaRPr lang="de-DE"/>
           </a:p>
@@ -1823,7 +1827,7 @@
           <p:cNvPr id="8" name="Fußzeilenplatzhalter 7">
             <a:extLst>
               <a:ext uri="{FF2B5EF4-FFF2-40B4-BE49-F238E27FC236}">
-                <a16:creationId xmlns:a16="http://schemas.microsoft.com/office/drawing/2014/main" id="{B0C0E1E7-94C0-397F-3635-6BD84F46741F}"/>
+                <a16:creationId xmlns:a16="http://schemas.microsoft.com/office/drawing/2014/main" id="{E94819A4-5334-9076-6CAD-F2539725B823}"/>
               </a:ext>
             </a:extLst>
           </p:cNvPr>
@@ -1848,7 +1852,7 @@
           <p:cNvPr id="9" name="Foliennummernplatzhalter 8">
             <a:extLst>
               <a:ext uri="{FF2B5EF4-FFF2-40B4-BE49-F238E27FC236}">
-                <a16:creationId xmlns:a16="http://schemas.microsoft.com/office/drawing/2014/main" id="{FF1CB13D-39EB-CC6A-4FDC-DAF19600BA99}"/>
+                <a16:creationId xmlns:a16="http://schemas.microsoft.com/office/drawing/2014/main" id="{A01CE5CF-9FAD-91AC-571D-D2213EA33D2F}"/>
               </a:ext>
             </a:extLst>
           </p:cNvPr>
@@ -1864,7 +1868,7 @@
           <a:bodyPr/>
           <a:lstStyle/>
           <a:p>
-            <a:fld id="{72B1D644-1C8C-4C9D-91C8-47B36D207CD5}" type="slidenum">
+            <a:fld id="{88063640-3A8E-482B-98FA-57CF740BEB7B}" type="slidenum">
               <a:rPr lang="de-DE" smtClean="0"/>
               <a:t>‹Nr.›</a:t>
             </a:fld>
@@ -1875,7 +1879,7 @@
     </p:spTree>
     <p:extLst>
       <p:ext uri="{BB962C8B-B14F-4D97-AF65-F5344CB8AC3E}">
-        <p14:creationId xmlns:p14="http://schemas.microsoft.com/office/powerpoint/2010/main" val="2119420655"/>
+        <p14:creationId xmlns:p14="http://schemas.microsoft.com/office/powerpoint/2010/main" val="2180826089"/>
       </p:ext>
     </p:extLst>
   </p:cSld>
@@ -1907,7 +1911,7 @@
           <p:cNvPr id="2" name="Titel 1">
             <a:extLst>
               <a:ext uri="{FF2B5EF4-FFF2-40B4-BE49-F238E27FC236}">
-                <a16:creationId xmlns:a16="http://schemas.microsoft.com/office/drawing/2014/main" id="{1F325BCE-7383-2775-9466-E60FAA98A07C}"/>
+                <a16:creationId xmlns:a16="http://schemas.microsoft.com/office/drawing/2014/main" id="{54EB200B-7AA6-C473-16B9-E71E6DEDD606}"/>
               </a:ext>
             </a:extLst>
           </p:cNvPr>
@@ -1935,7 +1939,7 @@
           <p:cNvPr id="3" name="Datumsplatzhalter 2">
             <a:extLst>
               <a:ext uri="{FF2B5EF4-FFF2-40B4-BE49-F238E27FC236}">
-                <a16:creationId xmlns:a16="http://schemas.microsoft.com/office/drawing/2014/main" id="{5E6D97F8-669D-72F0-8CAB-33CFE5FF5CCF}"/>
+                <a16:creationId xmlns:a16="http://schemas.microsoft.com/office/drawing/2014/main" id="{E6B2F3DC-0874-3986-1933-7B4FCFFDFD83}"/>
               </a:ext>
             </a:extLst>
           </p:cNvPr>
@@ -1951,9 +1955,9 @@
           <a:bodyPr/>
           <a:lstStyle/>
           <a:p>
-            <a:fld id="{A9EFEAB8-244A-4AB0-A984-D44E92764FF7}" type="datetimeFigureOut">
+            <a:fld id="{0FDCCD1D-F1EA-4304-9187-62589EACD3D0}" type="datetimeFigureOut">
               <a:rPr lang="de-DE" smtClean="0"/>
-              <a:t>09.10.2026</a:t>
+              <a:t>10.10.2026</a:t>
             </a:fld>
             <a:endParaRPr lang="de-DE"/>
           </a:p>
@@ -1964,7 +1968,7 @@
           <p:cNvPr id="4" name="Fußzeilenplatzhalter 3">
             <a:extLst>
               <a:ext uri="{FF2B5EF4-FFF2-40B4-BE49-F238E27FC236}">
-                <a16:creationId xmlns:a16="http://schemas.microsoft.com/office/drawing/2014/main" id="{109973B4-1D49-7D3C-1A49-20FA8207A455}"/>
+                <a16:creationId xmlns:a16="http://schemas.microsoft.com/office/drawing/2014/main" id="{A7B982B5-836C-904F-40FD-8E560E25D0F9}"/>
               </a:ext>
             </a:extLst>
           </p:cNvPr>
@@ -1989,7 +1993,7 @@
           <p:cNvPr id="5" name="Foliennummernplatzhalter 4">
             <a:extLst>
               <a:ext uri="{FF2B5EF4-FFF2-40B4-BE49-F238E27FC236}">
-                <a16:creationId xmlns:a16="http://schemas.microsoft.com/office/drawing/2014/main" id="{FEE3B1B8-3F57-BC46-F56D-001ED2FB8749}"/>
+                <a16:creationId xmlns:a16="http://schemas.microsoft.com/office/drawing/2014/main" id="{BE82DCCA-5D5C-41BA-DBA6-733606E98530}"/>
               </a:ext>
             </a:extLst>
           </p:cNvPr>
@@ -2005,7 +2009,7 @@
           <a:bodyPr/>
           <a:lstStyle/>
           <a:p>
-            <a:fld id="{72B1D644-1C8C-4C9D-91C8-47B36D207CD5}" type="slidenum">
+            <a:fld id="{88063640-3A8E-482B-98FA-57CF740BEB7B}" type="slidenum">
               <a:rPr lang="de-DE" smtClean="0"/>
               <a:t>‹Nr.›</a:t>
             </a:fld>
@@ -2016,7 +2020,7 @@
     </p:spTree>
     <p:extLst>
       <p:ext uri="{BB962C8B-B14F-4D97-AF65-F5344CB8AC3E}">
-        <p14:creationId xmlns:p14="http://schemas.microsoft.com/office/powerpoint/2010/main" val="2133247308"/>
+        <p14:creationId xmlns:p14="http://schemas.microsoft.com/office/powerpoint/2010/main" val="106080652"/>
       </p:ext>
     </p:extLst>
   </p:cSld>
@@ -2048,7 +2052,7 @@
           <p:cNvPr id="2" name="Datumsplatzhalter 1">
             <a:extLst>
               <a:ext uri="{FF2B5EF4-FFF2-40B4-BE49-F238E27FC236}">
-                <a16:creationId xmlns:a16="http://schemas.microsoft.com/office/drawing/2014/main" id="{52EFC5ED-3A63-FAB7-1870-C891D00C6C6B}"/>
+                <a16:creationId xmlns:a16="http://schemas.microsoft.com/office/drawing/2014/main" id="{3F28F22B-C864-5099-4290-D9B43AF6BBF4}"/>
               </a:ext>
             </a:extLst>
           </p:cNvPr>
@@ -2064,9 +2068,9 @@
           <a:bodyPr/>
           <a:lstStyle/>
           <a:p>
-            <a:fld id="{A9EFEAB8-244A-4AB0-A984-D44E92764FF7}" type="datetimeFigureOut">
+            <a:fld id="{0FDCCD1D-F1EA-4304-9187-62589EACD3D0}" type="datetimeFigureOut">
               <a:rPr lang="de-DE" smtClean="0"/>
-              <a:t>09.10.2026</a:t>
+              <a:t>10.10.2026</a:t>
             </a:fld>
             <a:endParaRPr lang="de-DE"/>
           </a:p>
@@ -2077,7 +2081,7 @@
           <p:cNvPr id="3" name="Fußzeilenplatzhalter 2">
             <a:extLst>
               <a:ext uri="{FF2B5EF4-FFF2-40B4-BE49-F238E27FC236}">
-                <a16:creationId xmlns:a16="http://schemas.microsoft.com/office/drawing/2014/main" id="{35F6B936-2098-CD89-0ABD-467BA8AC6FE8}"/>
+                <a16:creationId xmlns:a16="http://schemas.microsoft.com/office/drawing/2014/main" id="{F5675EC5-D100-A132-25D2-5B053BF51BC5}"/>
               </a:ext>
             </a:extLst>
           </p:cNvPr>
@@ -2102,7 +2106,7 @@
           <p:cNvPr id="4" name="Foliennummernplatzhalter 3">
             <a:extLst>
               <a:ext uri="{FF2B5EF4-FFF2-40B4-BE49-F238E27FC236}">
-                <a16:creationId xmlns:a16="http://schemas.microsoft.com/office/drawing/2014/main" id="{02B620AC-22F2-603F-35E2-2D74368BA18A}"/>
+                <a16:creationId xmlns:a16="http://schemas.microsoft.com/office/drawing/2014/main" id="{97FDEC91-9C86-AD0E-C393-F091BDD2767C}"/>
               </a:ext>
             </a:extLst>
           </p:cNvPr>
@@ -2118,7 +2122,7 @@
           <a:bodyPr/>
           <a:lstStyle/>
           <a:p>
-            <a:fld id="{72B1D644-1C8C-4C9D-91C8-47B36D207CD5}" type="slidenum">
+            <a:fld id="{88063640-3A8E-482B-98FA-57CF740BEB7B}" type="slidenum">
               <a:rPr lang="de-DE" smtClean="0"/>
               <a:t>‹Nr.›</a:t>
             </a:fld>
@@ -2129,7 +2133,7 @@
     </p:spTree>
     <p:extLst>
       <p:ext uri="{BB962C8B-B14F-4D97-AF65-F5344CB8AC3E}">
-        <p14:creationId xmlns:p14="http://schemas.microsoft.com/office/powerpoint/2010/main" val="2660754500"/>
+        <p14:creationId xmlns:p14="http://schemas.microsoft.com/office/powerpoint/2010/main" val="2968622982"/>
       </p:ext>
     </p:extLst>
   </p:cSld>
@@ -2161,7 +2165,7 @@
           <p:cNvPr id="2" name="Titel 1">
             <a:extLst>
               <a:ext uri="{FF2B5EF4-FFF2-40B4-BE49-F238E27FC236}">
-                <a16:creationId xmlns:a16="http://schemas.microsoft.com/office/drawing/2014/main" id="{8AA001EC-AE0D-2762-5824-E0A84A15DE67}"/>
+                <a16:creationId xmlns:a16="http://schemas.microsoft.com/office/drawing/2014/main" id="{20500B98-2FD6-6CE3-B937-7CA2542008B7}"/>
               </a:ext>
             </a:extLst>
           </p:cNvPr>
@@ -2198,7 +2202,7 @@
           <p:cNvPr id="3" name="Inhaltsplatzhalter 2">
             <a:extLst>
               <a:ext uri="{FF2B5EF4-FFF2-40B4-BE49-F238E27FC236}">
-                <a16:creationId xmlns:a16="http://schemas.microsoft.com/office/drawing/2014/main" id="{F7FFC04B-79B0-1383-1292-441A9D3F9989}"/>
+                <a16:creationId xmlns:a16="http://schemas.microsoft.com/office/drawing/2014/main" id="{01AE5D46-53E3-32EA-23A0-7DC8B6ECE032}"/>
               </a:ext>
             </a:extLst>
           </p:cNvPr>
@@ -2288,7 +2292,7 @@
           <p:cNvPr id="4" name="Textplatzhalter 3">
             <a:extLst>
               <a:ext uri="{FF2B5EF4-FFF2-40B4-BE49-F238E27FC236}">
-                <a16:creationId xmlns:a16="http://schemas.microsoft.com/office/drawing/2014/main" id="{81A6F9FE-DD01-3EEE-65DB-28599FFE2EEF}"/>
+                <a16:creationId xmlns:a16="http://schemas.microsoft.com/office/drawing/2014/main" id="{3B021A4B-9B79-76E8-4588-9093FBCDF453}"/>
               </a:ext>
             </a:extLst>
           </p:cNvPr>
@@ -2359,7 +2363,7 @@
           <p:cNvPr id="5" name="Datumsplatzhalter 4">
             <a:extLst>
               <a:ext uri="{FF2B5EF4-FFF2-40B4-BE49-F238E27FC236}">
-                <a16:creationId xmlns:a16="http://schemas.microsoft.com/office/drawing/2014/main" id="{539B2E3E-1030-F257-BDFE-5B02B81D737F}"/>
+                <a16:creationId xmlns:a16="http://schemas.microsoft.com/office/drawing/2014/main" id="{483F4327-12CA-2788-8193-02E8A750A32F}"/>
               </a:ext>
             </a:extLst>
           </p:cNvPr>
@@ -2375,9 +2379,9 @@
           <a:bodyPr/>
           <a:lstStyle/>
           <a:p>
-            <a:fld id="{A9EFEAB8-244A-4AB0-A984-D44E92764FF7}" type="datetimeFigureOut">
+            <a:fld id="{0FDCCD1D-F1EA-4304-9187-62589EACD3D0}" type="datetimeFigureOut">
               <a:rPr lang="de-DE" smtClean="0"/>
-              <a:t>09.10.2026</a:t>
+              <a:t>10.10.2026</a:t>
             </a:fld>
             <a:endParaRPr lang="de-DE"/>
           </a:p>
@@ -2388,7 +2392,7 @@
           <p:cNvPr id="6" name="Fußzeilenplatzhalter 5">
             <a:extLst>
               <a:ext uri="{FF2B5EF4-FFF2-40B4-BE49-F238E27FC236}">
-                <a16:creationId xmlns:a16="http://schemas.microsoft.com/office/drawing/2014/main" id="{E6E112C2-F473-8F9F-183F-9F46DD1146CE}"/>
+                <a16:creationId xmlns:a16="http://schemas.microsoft.com/office/drawing/2014/main" id="{D074C1CC-C86B-B61E-5129-51F7DFF3B831}"/>
               </a:ext>
             </a:extLst>
           </p:cNvPr>
@@ -2413,7 +2417,7 @@
           <p:cNvPr id="7" name="Foliennummernplatzhalter 6">
             <a:extLst>
               <a:ext uri="{FF2B5EF4-FFF2-40B4-BE49-F238E27FC236}">
-                <a16:creationId xmlns:a16="http://schemas.microsoft.com/office/drawing/2014/main" id="{9BE15141-B827-C06F-327B-B7A884909EBE}"/>
+                <a16:creationId xmlns:a16="http://schemas.microsoft.com/office/drawing/2014/main" id="{2A6DB4D8-5AF5-C910-B1F7-E311CB85F25E}"/>
               </a:ext>
             </a:extLst>
           </p:cNvPr>
@@ -2429,7 +2433,7 @@
           <a:bodyPr/>
           <a:lstStyle/>
           <a:p>
-            <a:fld id="{72B1D644-1C8C-4C9D-91C8-47B36D207CD5}" type="slidenum">
+            <a:fld id="{88063640-3A8E-482B-98FA-57CF740BEB7B}" type="slidenum">
               <a:rPr lang="de-DE" smtClean="0"/>
               <a:t>‹Nr.›</a:t>
             </a:fld>
@@ -2440,7 +2444,7 @@
     </p:spTree>
     <p:extLst>
       <p:ext uri="{BB962C8B-B14F-4D97-AF65-F5344CB8AC3E}">
-        <p14:creationId xmlns:p14="http://schemas.microsoft.com/office/powerpoint/2010/main" val="3513098868"/>
+        <p14:creationId xmlns:p14="http://schemas.microsoft.com/office/powerpoint/2010/main" val="3602240467"/>
       </p:ext>
     </p:extLst>
   </p:cSld>
@@ -2472,7 +2476,7 @@
           <p:cNvPr id="2" name="Titel 1">
             <a:extLst>
               <a:ext uri="{FF2B5EF4-FFF2-40B4-BE49-F238E27FC236}">
-                <a16:creationId xmlns:a16="http://schemas.microsoft.com/office/drawing/2014/main" id="{BCE9E09D-B6C5-3728-89D1-6D35BDD1618C}"/>
+                <a16:creationId xmlns:a16="http://schemas.microsoft.com/office/drawing/2014/main" id="{B6A23B7B-FA93-1966-B54E-E3F82163E281}"/>
               </a:ext>
             </a:extLst>
           </p:cNvPr>
@@ -2509,7 +2513,7 @@
           <p:cNvPr id="3" name="Bildplatzhalter 2">
             <a:extLst>
               <a:ext uri="{FF2B5EF4-FFF2-40B4-BE49-F238E27FC236}">
-                <a16:creationId xmlns:a16="http://schemas.microsoft.com/office/drawing/2014/main" id="{2F8B7FC6-B612-8C6F-6BBF-1A1C598D3120}"/>
+                <a16:creationId xmlns:a16="http://schemas.microsoft.com/office/drawing/2014/main" id="{8871064A-1C95-464A-A723-6E4CB3194485}"/>
               </a:ext>
             </a:extLst>
           </p:cNvPr>
@@ -2576,7 +2580,7 @@
           <p:cNvPr id="4" name="Textplatzhalter 3">
             <a:extLst>
               <a:ext uri="{FF2B5EF4-FFF2-40B4-BE49-F238E27FC236}">
-                <a16:creationId xmlns:a16="http://schemas.microsoft.com/office/drawing/2014/main" id="{2D7481DA-A330-5FE4-692A-FC0853BCDD6F}"/>
+                <a16:creationId xmlns:a16="http://schemas.microsoft.com/office/drawing/2014/main" id="{0CFD8EEC-4B11-9327-2B8E-F39C1902EB63}"/>
               </a:ext>
             </a:extLst>
           </p:cNvPr>
@@ -2647,7 +2651,7 @@
           <p:cNvPr id="5" name="Datumsplatzhalter 4">
             <a:extLst>
               <a:ext uri="{FF2B5EF4-FFF2-40B4-BE49-F238E27FC236}">
-                <a16:creationId xmlns:a16="http://schemas.microsoft.com/office/drawing/2014/main" id="{88DE9637-341E-8C81-9A9F-D3A9525745AC}"/>
+                <a16:creationId xmlns:a16="http://schemas.microsoft.com/office/drawing/2014/main" id="{4A33724B-55E5-48A5-E00C-877AF30ED1D4}"/>
               </a:ext>
             </a:extLst>
           </p:cNvPr>
@@ -2663,9 +2667,9 @@
           <a:bodyPr/>
           <a:lstStyle/>
           <a:p>
-            <a:fld id="{A9EFEAB8-244A-4AB0-A984-D44E92764FF7}" type="datetimeFigureOut">
+            <a:fld id="{0FDCCD1D-F1EA-4304-9187-62589EACD3D0}" type="datetimeFigureOut">
               <a:rPr lang="de-DE" smtClean="0"/>
-              <a:t>09.10.2026</a:t>
+              <a:t>10.10.2026</a:t>
             </a:fld>
             <a:endParaRPr lang="de-DE"/>
           </a:p>
@@ -2676,7 +2680,7 @@
           <p:cNvPr id="6" name="Fußzeilenplatzhalter 5">
             <a:extLst>
               <a:ext uri="{FF2B5EF4-FFF2-40B4-BE49-F238E27FC236}">
-                <a16:creationId xmlns:a16="http://schemas.microsoft.com/office/drawing/2014/main" id="{8B73D8F1-BCEB-6D50-B88C-03B205F9C27E}"/>
+                <a16:creationId xmlns:a16="http://schemas.microsoft.com/office/drawing/2014/main" id="{90AB9BA5-1D62-1E70-8DC0-818A69B54D21}"/>
               </a:ext>
             </a:extLst>
           </p:cNvPr>
@@ -2701,7 +2705,7 @@
           <p:cNvPr id="7" name="Foliennummernplatzhalter 6">
             <a:extLst>
               <a:ext uri="{FF2B5EF4-FFF2-40B4-BE49-F238E27FC236}">
-                <a16:creationId xmlns:a16="http://schemas.microsoft.com/office/drawing/2014/main" id="{AE4CDF55-FB4B-535A-3B60-1E8FE250904F}"/>
+                <a16:creationId xmlns:a16="http://schemas.microsoft.com/office/drawing/2014/main" id="{3A36A0FA-33A3-9B86-8B8C-715E34A27298}"/>
               </a:ext>
             </a:extLst>
           </p:cNvPr>
@@ -2717,7 +2721,7 @@
           <a:bodyPr/>
           <a:lstStyle/>
           <a:p>
-            <a:fld id="{72B1D644-1C8C-4C9D-91C8-47B36D207CD5}" type="slidenum">
+            <a:fld id="{88063640-3A8E-482B-98FA-57CF740BEB7B}" type="slidenum">
               <a:rPr lang="de-DE" smtClean="0"/>
               <a:t>‹Nr.›</a:t>
             </a:fld>
@@ -2728,7 +2732,7 @@
     </p:spTree>
     <p:extLst>
       <p:ext uri="{BB962C8B-B14F-4D97-AF65-F5344CB8AC3E}">
-        <p14:creationId xmlns:p14="http://schemas.microsoft.com/office/powerpoint/2010/main" val="527424162"/>
+        <p14:creationId xmlns:p14="http://schemas.microsoft.com/office/powerpoint/2010/main" val="3666740135"/>
       </p:ext>
     </p:extLst>
   </p:cSld>
@@ -2765,7 +2769,7 @@
           <p:cNvPr id="2" name="Titelplatzhalter 1">
             <a:extLst>
               <a:ext uri="{FF2B5EF4-FFF2-40B4-BE49-F238E27FC236}">
-                <a16:creationId xmlns:a16="http://schemas.microsoft.com/office/drawing/2014/main" id="{5C87D78E-605E-A490-B7C8-053392CCFCCD}"/>
+                <a16:creationId xmlns:a16="http://schemas.microsoft.com/office/drawing/2014/main" id="{4FB32CFC-D876-D04F-0681-C349535912A3}"/>
               </a:ext>
             </a:extLst>
           </p:cNvPr>
@@ -2803,7 +2807,7 @@
           <p:cNvPr id="3" name="Textplatzhalter 2">
             <a:extLst>
               <a:ext uri="{FF2B5EF4-FFF2-40B4-BE49-F238E27FC236}">
-                <a16:creationId xmlns:a16="http://schemas.microsoft.com/office/drawing/2014/main" id="{AD00D57E-C0D4-29F3-7172-C4BD02D1FB9E}"/>
+                <a16:creationId xmlns:a16="http://schemas.microsoft.com/office/drawing/2014/main" id="{089DC5CF-0134-F10E-B808-39C29C109989}"/>
               </a:ext>
             </a:extLst>
           </p:cNvPr>
@@ -2870,7 +2874,7 @@
           <p:cNvPr id="4" name="Datumsplatzhalter 3">
             <a:extLst>
               <a:ext uri="{FF2B5EF4-FFF2-40B4-BE49-F238E27FC236}">
-                <a16:creationId xmlns:a16="http://schemas.microsoft.com/office/drawing/2014/main" id="{714F3F7A-00F8-109E-AC11-3CBBA6A672A1}"/>
+                <a16:creationId xmlns:a16="http://schemas.microsoft.com/office/drawing/2014/main" id="{7450A409-026C-C09D-0D0E-EE7C4175E748}"/>
               </a:ext>
             </a:extLst>
           </p:cNvPr>
@@ -2904,9 +2908,9 @@
             </a:lvl1pPr>
           </a:lstStyle>
           <a:p>
-            <a:fld id="{A9EFEAB8-244A-4AB0-A984-D44E92764FF7}" type="datetimeFigureOut">
+            <a:fld id="{0FDCCD1D-F1EA-4304-9187-62589EACD3D0}" type="datetimeFigureOut">
               <a:rPr lang="de-DE" smtClean="0"/>
-              <a:t>09.10.2026</a:t>
+              <a:t>10.10.2026</a:t>
             </a:fld>
             <a:endParaRPr lang="de-DE"/>
           </a:p>
@@ -2917,7 +2921,7 @@
           <p:cNvPr id="5" name="Fußzeilenplatzhalter 4">
             <a:extLst>
               <a:ext uri="{FF2B5EF4-FFF2-40B4-BE49-F238E27FC236}">
-                <a16:creationId xmlns:a16="http://schemas.microsoft.com/office/drawing/2014/main" id="{8633A0B4-A7E0-258F-6B34-3A8BAED404DB}"/>
+                <a16:creationId xmlns:a16="http://schemas.microsoft.com/office/drawing/2014/main" id="{223F57D9-4E70-5378-8D61-0FF6B6B78BF7}"/>
               </a:ext>
             </a:extLst>
           </p:cNvPr>
@@ -2960,7 +2964,7 @@
           <p:cNvPr id="6" name="Foliennummernplatzhalter 5">
             <a:extLst>
               <a:ext uri="{FF2B5EF4-FFF2-40B4-BE49-F238E27FC236}">
-                <a16:creationId xmlns:a16="http://schemas.microsoft.com/office/drawing/2014/main" id="{50B3F53E-6E16-AD97-BE83-74AB766A05CC}"/>
+                <a16:creationId xmlns:a16="http://schemas.microsoft.com/office/drawing/2014/main" id="{A183BA7D-3B86-DAF6-AAA9-163EBB640EF6}"/>
               </a:ext>
             </a:extLst>
           </p:cNvPr>
@@ -2994,7 +2998,7 @@
             </a:lvl1pPr>
           </a:lstStyle>
           <a:p>
-            <a:fld id="{72B1D644-1C8C-4C9D-91C8-47B36D207CD5}" type="slidenum">
+            <a:fld id="{88063640-3A8E-482B-98FA-57CF740BEB7B}" type="slidenum">
               <a:rPr lang="de-DE" smtClean="0"/>
               <a:t>‹Nr.›</a:t>
             </a:fld>
@@ -3005,7 +3009,7 @@
     </p:spTree>
     <p:extLst>
       <p:ext uri="{BB962C8B-B14F-4D97-AF65-F5344CB8AC3E}">
-        <p14:creationId xmlns:p14="http://schemas.microsoft.com/office/powerpoint/2010/main" val="1422956266"/>
+        <p14:creationId xmlns:p14="http://schemas.microsoft.com/office/powerpoint/2010/main" val="3802083882"/>
       </p:ext>
     </p:extLst>
   </p:cSld>
@@ -3328,7 +3332,7 @@
           <p:cNvPr id="2" name="Textfeld 1">
             <a:extLst>
               <a:ext uri="{FF2B5EF4-FFF2-40B4-BE49-F238E27FC236}">
-                <a16:creationId xmlns:a16="http://schemas.microsoft.com/office/drawing/2014/main" id="{5E60F46A-4F85-EC5C-45F2-7E0CEA341833}"/>
+                <a16:creationId xmlns:a16="http://schemas.microsoft.com/office/drawing/2014/main" id="{733FA9DC-070B-9ECC-8FDD-960EE454B9B7}"/>
               </a:ext>
             </a:extLst>
           </p:cNvPr>
@@ -3380,7 +3384,7 @@
           <p:cNvPr id="3" name="Textfeld 2">
             <a:extLst>
               <a:ext uri="{FF2B5EF4-FFF2-40B4-BE49-F238E27FC236}">
-                <a16:creationId xmlns:a16="http://schemas.microsoft.com/office/drawing/2014/main" id="{6EEEC898-4CDC-71EE-EC12-6A3B63859BAF}"/>
+                <a16:creationId xmlns:a16="http://schemas.microsoft.com/office/drawing/2014/main" id="{E575FA3A-9E61-6649-5DF0-CD0AF14C7E7C}"/>
               </a:ext>
             </a:extLst>
           </p:cNvPr>
@@ -3432,7 +3436,7 @@
           <p:cNvPr id="4" name="Textfeld 3">
             <a:extLst>
               <a:ext uri="{FF2B5EF4-FFF2-40B4-BE49-F238E27FC236}">
-                <a16:creationId xmlns:a16="http://schemas.microsoft.com/office/drawing/2014/main" id="{2898BC63-2505-DE31-CDAB-F5F33317F1B0}"/>
+                <a16:creationId xmlns:a16="http://schemas.microsoft.com/office/drawing/2014/main" id="{709CFD80-A241-E9F0-B41C-48CBC6F402B3}"/>
               </a:ext>
             </a:extLst>
           </p:cNvPr>
@@ -3484,7 +3488,7 @@
           <p:cNvPr id="5" name="Textfeld 4">
             <a:extLst>
               <a:ext uri="{FF2B5EF4-FFF2-40B4-BE49-F238E27FC236}">
-                <a16:creationId xmlns:a16="http://schemas.microsoft.com/office/drawing/2014/main" id="{C3DD2351-CBDA-6842-CECC-C151D09063E0}"/>
+                <a16:creationId xmlns:a16="http://schemas.microsoft.com/office/drawing/2014/main" id="{89F0295A-EBC6-436B-E575-042842BBA0A4}"/>
               </a:ext>
             </a:extLst>
           </p:cNvPr>
@@ -3536,7 +3540,7 @@
           <p:cNvPr id="6" name="Textfeld 5">
             <a:extLst>
               <a:ext uri="{FF2B5EF4-FFF2-40B4-BE49-F238E27FC236}">
-                <a16:creationId xmlns:a16="http://schemas.microsoft.com/office/drawing/2014/main" id="{57C65612-4BE9-38FC-465F-915261352C69}"/>
+                <a16:creationId xmlns:a16="http://schemas.microsoft.com/office/drawing/2014/main" id="{01CD44C1-2E19-002D-A397-49026B1D90C8}"/>
               </a:ext>
             </a:extLst>
           </p:cNvPr>
@@ -3586,7 +3590,7 @@
     </p:spTree>
     <p:extLst>
       <p:ext uri="{BB962C8B-B14F-4D97-AF65-F5344CB8AC3E}">
-        <p14:creationId xmlns:p14="http://schemas.microsoft.com/office/powerpoint/2010/main" val="4291233530"/>
+        <p14:creationId xmlns:p14="http://schemas.microsoft.com/office/powerpoint/2010/main" val="3728756671"/>
       </p:ext>
     </p:extLst>
   </p:cSld>
@@ -3618,7 +3622,7 @@
           <p:cNvPr id="2" name="Textfeld 1">
             <a:extLst>
               <a:ext uri="{FF2B5EF4-FFF2-40B4-BE49-F238E27FC236}">
-                <a16:creationId xmlns:a16="http://schemas.microsoft.com/office/drawing/2014/main" id="{5A8AD4B8-9A64-A3D0-8868-E0C384D8D372}"/>
+                <a16:creationId xmlns:a16="http://schemas.microsoft.com/office/drawing/2014/main" id="{2B1C9BC4-C617-FEAA-3B00-DD6E9A32A45F}"/>
               </a:ext>
             </a:extLst>
           </p:cNvPr>
@@ -3703,7 +3707,7 @@
           <p:cNvPr id="3" name="Textfeld 2">
             <a:extLst>
               <a:ext uri="{FF2B5EF4-FFF2-40B4-BE49-F238E27FC236}">
-                <a16:creationId xmlns:a16="http://schemas.microsoft.com/office/drawing/2014/main" id="{EE40EFE5-6E4E-B73E-00D5-77CBA221CDA1}"/>
+                <a16:creationId xmlns:a16="http://schemas.microsoft.com/office/drawing/2014/main" id="{8033781B-8C06-1994-E178-014292D33695}"/>
               </a:ext>
             </a:extLst>
           </p:cNvPr>
@@ -3786,7 +3790,7 @@
     </p:spTree>
     <p:extLst>
       <p:ext uri="{BB962C8B-B14F-4D97-AF65-F5344CB8AC3E}">
-        <p14:creationId xmlns:p14="http://schemas.microsoft.com/office/powerpoint/2010/main" val="619984634"/>
+        <p14:creationId xmlns:p14="http://schemas.microsoft.com/office/powerpoint/2010/main" val="1108828140"/>
       </p:ext>
     </p:extLst>
   </p:cSld>
@@ -3818,7 +3822,7 @@
           <p:cNvPr id="2" name="Textfeld 1">
             <a:extLst>
               <a:ext uri="{FF2B5EF4-FFF2-40B4-BE49-F238E27FC236}">
-                <a16:creationId xmlns:a16="http://schemas.microsoft.com/office/drawing/2014/main" id="{3CB3FCB5-BD39-5671-D3A9-5B5FF1F6DB36}"/>
+                <a16:creationId xmlns:a16="http://schemas.microsoft.com/office/drawing/2014/main" id="{48F19E98-9D3F-E12F-56FC-AEBAEC206055}"/>
               </a:ext>
             </a:extLst>
           </p:cNvPr>
@@ -3860,7 +3864,7 @@
           <p:cNvPr id="3" name="Textfeld 2">
             <a:extLst>
               <a:ext uri="{FF2B5EF4-FFF2-40B4-BE49-F238E27FC236}">
-                <a16:creationId xmlns:a16="http://schemas.microsoft.com/office/drawing/2014/main" id="{6B1EFDD5-60CC-B75B-C8C7-1D61DE4C6712}"/>
+                <a16:creationId xmlns:a16="http://schemas.microsoft.com/office/drawing/2014/main" id="{31893BE4-7A34-A1F7-ECB7-7C0D40D91BA6}"/>
               </a:ext>
             </a:extLst>
           </p:cNvPr>
@@ -3902,7 +3906,7 @@
           <p:cNvPr id="4" name="Textfeld 3">
             <a:extLst>
               <a:ext uri="{FF2B5EF4-FFF2-40B4-BE49-F238E27FC236}">
-                <a16:creationId xmlns:a16="http://schemas.microsoft.com/office/drawing/2014/main" id="{BB267EFC-287B-9FF4-8703-C9D4BD4A2F2A}"/>
+                <a16:creationId xmlns:a16="http://schemas.microsoft.com/office/drawing/2014/main" id="{F2BBD0F8-34AE-B1FB-A2D5-EB7B9655F884}"/>
               </a:ext>
             </a:extLst>
           </p:cNvPr>
@@ -3962,7 +3966,7 @@
           <p:cNvPr id="5" name="Textfeld 4">
             <a:extLst>
               <a:ext uri="{FF2B5EF4-FFF2-40B4-BE49-F238E27FC236}">
-                <a16:creationId xmlns:a16="http://schemas.microsoft.com/office/drawing/2014/main" id="{54AFC75A-342C-4C85-1BD9-8B6365C4856C}"/>
+                <a16:creationId xmlns:a16="http://schemas.microsoft.com/office/drawing/2014/main" id="{912D69AC-376C-0912-6E4B-4BE794EEC1E6}"/>
               </a:ext>
             </a:extLst>
           </p:cNvPr>
@@ -4020,7 +4024,1211 @@
     </p:spTree>
     <p:extLst>
       <p:ext uri="{BB962C8B-B14F-4D97-AF65-F5344CB8AC3E}">
-        <p14:creationId xmlns:p14="http://schemas.microsoft.com/office/powerpoint/2010/main" val="1580881816"/>
+        <p14:creationId xmlns:p14="http://schemas.microsoft.com/office/powerpoint/2010/main" val="2940620954"/>
+      </p:ext>
+    </p:extLst>
+  </p:cSld>
+  <p:clrMapOvr>
+    <a:masterClrMapping/>
+  </p:clrMapOvr>
+</p:sld>
+</file>
+
+<file path=ppt/slides/slide4.xml><?xml version="1.0" encoding="utf-8"?>
+<p:sld xmlns:a="http://schemas.openxmlformats.org/drawingml/2006/main" xmlns:r="http://schemas.openxmlformats.org/officeDocument/2006/relationships" xmlns:p="http://schemas.openxmlformats.org/presentationml/2006/main">
+  <p:cSld>
+    <p:spTree>
+      <p:nvGrpSpPr>
+        <p:cNvPr id="1" name=""/>
+        <p:cNvGrpSpPr/>
+        <p:nvPr/>
+      </p:nvGrpSpPr>
+      <p:grpSpPr>
+        <a:xfrm>
+          <a:off x="0" y="0"/>
+          <a:ext cx="0" cy="0"/>
+          <a:chOff x="0" y="0"/>
+          <a:chExt cx="0" cy="0"/>
+        </a:xfrm>
+      </p:grpSpPr>
+      <p:sp>
+        <p:nvSpPr>
+          <p:cNvPr id="2" name="Textfeld 1">
+            <a:extLst>
+              <a:ext uri="{FF2B5EF4-FFF2-40B4-BE49-F238E27FC236}">
+                <a16:creationId xmlns:a16="http://schemas.microsoft.com/office/drawing/2014/main" id="{3FE8754E-EBDC-AF48-E9B4-A907E68F6C18}"/>
+              </a:ext>
+            </a:extLst>
+          </p:cNvPr>
+          <p:cNvSpPr txBox="1"/>
+          <p:nvPr/>
+        </p:nvSpPr>
+        <p:spPr>
+          <a:xfrm>
+            <a:off x="381000" y="2286000"/>
+            <a:ext cx="5461000" cy="2095500"/>
+          </a:xfrm>
+          <a:prstGeom prst="rect">
+            <a:avLst/>
+          </a:prstGeom>
+          <a:noFill/>
+          <a:ln>
+            <a:solidFill>
+              <a:srgbClr val="BFBFBF"/>
+            </a:solidFill>
+          </a:ln>
+        </p:spPr>
+        <p:txBody>
+          <a:bodyPr vert="horz" wrap="square" rtlCol="0" anchor="ctr">
+            <a:noAutofit/>
+          </a:bodyPr>
+          <a:lstStyle/>
+          <a:p>
+            <a:pPr>
+              <a:lnSpc>
+                <a:spcPct val="90000"/>
+              </a:lnSpc>
+            </a:pPr>
+            <a:r>
+              <a:rPr lang="en-US" sz="2900">
+                <a:latin typeface="Calibri" panose="020F0502020204030204" pitchFamily="34" charset="0"/>
+              </a:rPr>
+              <a:t>Opening Lecture</a:t>
+            </a:r>
+            <a:br>
+              <a:rPr lang="en-US" sz="5300">
+                <a:latin typeface="Calibri" panose="020F0502020204030204" pitchFamily="34" charset="0"/>
+              </a:rPr>
+            </a:br>
+            <a:r>
+              <a:rPr lang="en-US" sz="6000">
+                <a:latin typeface="Calibri" panose="020F0502020204030204" pitchFamily="34" charset="0"/>
+              </a:rPr>
+              <a:t>THE TITLE</a:t>
+            </a:r>
+            <a:br>
+              <a:rPr lang="en-US" sz="2600">
+                <a:latin typeface="Calibri" panose="020F0502020204030204" pitchFamily="34" charset="0"/>
+              </a:rPr>
+            </a:br>
+            <a:br>
+              <a:rPr lang="en-US" sz="2600">
+                <a:latin typeface="Calibri" panose="020F0502020204030204" pitchFamily="34" charset="0"/>
+              </a:rPr>
+            </a:br>
+            <a:r>
+              <a:rPr lang="en-US" sz="2600">
+                <a:latin typeface="Calibri" panose="020F0502020204030204" pitchFamily="34" charset="0"/>
+              </a:rPr>
+              <a:t>Subject: </a:t>
+            </a:r>
+            <a:r>
+              <a:rPr lang="en-US" sz="2400">
+                <a:latin typeface="Calibri" panose="020F0502020204030204" pitchFamily="34" charset="0"/>
+              </a:rPr>
+              <a:t>Shared Workshops</a:t>
+            </a:r>
+            <a:br>
+              <a:rPr lang="en-US" sz="2400">
+                <a:latin typeface="Calibri" panose="020F0502020204030204" pitchFamily="34" charset="0"/>
+              </a:rPr>
+            </a:br>
+            <a:br>
+              <a:rPr lang="en-US" sz="2400">
+                <a:latin typeface="Calibri" panose="020F0502020204030204" pitchFamily="34" charset="0"/>
+              </a:rPr>
+            </a:br>
+            <a:r>
+              <a:rPr lang="en-US">
+                <a:latin typeface="Calibri" panose="020F0502020204030204" pitchFamily="34" charset="0"/>
+              </a:rPr>
+              <a:t>March 2024</a:t>
+            </a:r>
+            <a:endParaRPr lang="de-DE">
+              <a:latin typeface="Calibri" panose="020F0502020204030204" pitchFamily="34" charset="0"/>
+            </a:endParaRPr>
+          </a:p>
+        </p:txBody>
+      </p:sp>
+      <p:sp>
+        <p:nvSpPr>
+          <p:cNvPr id="3" name="Textfeld 2">
+            <a:extLst>
+              <a:ext uri="{FF2B5EF4-FFF2-40B4-BE49-F238E27FC236}">
+                <a16:creationId xmlns:a16="http://schemas.microsoft.com/office/drawing/2014/main" id="{6098F1D5-D1FD-24C5-52D1-27A453A24F58}"/>
+              </a:ext>
+            </a:extLst>
+          </p:cNvPr>
+          <p:cNvSpPr txBox="1"/>
+          <p:nvPr/>
+        </p:nvSpPr>
+        <p:spPr>
+          <a:xfrm>
+            <a:off x="6350000" y="254000"/>
+            <a:ext cx="2540000" cy="6350000"/>
+          </a:xfrm>
+          <a:prstGeom prst="rect">
+            <a:avLst/>
+          </a:prstGeom>
+          <a:noFill/>
+          <a:ln>
+            <a:solidFill>
+              <a:srgbClr val="BFBFBF"/>
+            </a:solidFill>
+          </a:ln>
+        </p:spPr>
+        <p:txBody>
+          <a:bodyPr vert="horz" wrap="square" rtlCol="0">
+            <a:noAutofit/>
+          </a:bodyPr>
+          <a:lstStyle/>
+          <a:p>
+            <a:r>
+              <a:rPr lang="de-DE" sz="2000">
+                <a:latin typeface="Calibri" panose="020F0502020204030204" pitchFamily="34" charset="0"/>
+              </a:rPr>
+              <a:t>abc</a:t>
+            </a:r>
+            <a:br>
+              <a:rPr lang="de-DE" sz="6000">
+                <a:latin typeface="Calibri" panose="020F0502020204030204" pitchFamily="34" charset="0"/>
+              </a:rPr>
+            </a:br>
+            <a:r>
+              <a:rPr lang="de-DE" sz="2000">
+                <a:latin typeface="Calibri" panose="020F0502020204030204" pitchFamily="34" charset="0"/>
+              </a:rPr>
+              <a:t>def</a:t>
+            </a:r>
+            <a:br>
+              <a:rPr lang="de-DE" sz="1000">
+                <a:latin typeface="Calibri" panose="020F0502020204030204" pitchFamily="34" charset="0"/>
+              </a:rPr>
+            </a:br>
+            <a:r>
+              <a:rPr lang="de-DE" sz="4000">
+                <a:latin typeface="Calibri" panose="020F0502020204030204" pitchFamily="34" charset="0"/>
+              </a:rPr>
+              <a:t>ghi</a:t>
+            </a:r>
+            <a:br>
+              <a:rPr lang="de-DE" sz="1000">
+                <a:latin typeface="Calibri" panose="020F0502020204030204" pitchFamily="34" charset="0"/>
+              </a:rPr>
+            </a:br>
+            <a:r>
+              <a:rPr lang="de-DE" sz="2000">
+                <a:latin typeface="Calibri" panose="020F0502020204030204" pitchFamily="34" charset="0"/>
+              </a:rPr>
+              <a:t>jkl</a:t>
+            </a:r>
+          </a:p>
+        </p:txBody>
+      </p:sp>
+      <p:sp>
+        <p:nvSpPr>
+          <p:cNvPr id="4" name="Textfeld 3">
+            <a:extLst>
+              <a:ext uri="{FF2B5EF4-FFF2-40B4-BE49-F238E27FC236}">
+                <a16:creationId xmlns:a16="http://schemas.microsoft.com/office/drawing/2014/main" id="{626B175B-BE17-F30A-13E6-45BD90B9B2F0}"/>
+              </a:ext>
+            </a:extLst>
+          </p:cNvPr>
+          <p:cNvSpPr txBox="1"/>
+          <p:nvPr/>
+        </p:nvSpPr>
+        <p:spPr>
+          <a:xfrm>
+            <a:off x="9271000" y="254000"/>
+            <a:ext cx="2540000" cy="6350000"/>
+          </a:xfrm>
+          <a:prstGeom prst="rect">
+            <a:avLst/>
+          </a:prstGeom>
+          <a:noFill/>
+          <a:ln>
+            <a:solidFill>
+              <a:srgbClr val="BFBFBF"/>
+            </a:solidFill>
+          </a:ln>
+        </p:spPr>
+        <p:txBody>
+          <a:bodyPr vert="horz" wrap="square" rtlCol="0">
+            <a:noAutofit/>
+          </a:bodyPr>
+          <a:lstStyle/>
+          <a:p>
+            <a:r>
+              <a:rPr lang="de-DE" sz="2000">
+                <a:latin typeface="Calibri" panose="020F0502020204030204" pitchFamily="34" charset="0"/>
+              </a:rPr>
+              <a:t>abc</a:t>
+            </a:r>
+            <a:br>
+              <a:rPr lang="de-DE" sz="2000">
+                <a:latin typeface="Calibri" panose="020F0502020204030204" pitchFamily="34" charset="0"/>
+              </a:rPr>
+            </a:br>
+            <a:br>
+              <a:rPr lang="de-DE" sz="6000">
+                <a:latin typeface="Calibri" panose="020F0502020204030204" pitchFamily="34" charset="0"/>
+              </a:rPr>
+            </a:br>
+            <a:br>
+              <a:rPr lang="de-DE" sz="1000">
+                <a:latin typeface="Calibri" panose="020F0502020204030204" pitchFamily="34" charset="0"/>
+              </a:rPr>
+            </a:br>
+            <a:r>
+              <a:rPr lang="de-DE" sz="2000">
+                <a:latin typeface="Calibri" panose="020F0502020204030204" pitchFamily="34" charset="0"/>
+              </a:rPr>
+              <a:t>def</a:t>
+            </a:r>
+            <a:br>
+              <a:rPr lang="de-DE" sz="4000">
+                <a:latin typeface="Calibri" panose="020F0502020204030204" pitchFamily="34" charset="0"/>
+              </a:rPr>
+            </a:br>
+            <a:br>
+              <a:rPr lang="de-DE" sz="2000">
+                <a:latin typeface="Calibri" panose="020F0502020204030204" pitchFamily="34" charset="0"/>
+              </a:rPr>
+            </a:br>
+            <a:r>
+              <a:rPr lang="de-DE" sz="2000">
+                <a:latin typeface="Calibri" panose="020F0502020204030204" pitchFamily="34" charset="0"/>
+              </a:rPr>
+              <a:t>ghi</a:t>
+            </a:r>
+          </a:p>
+        </p:txBody>
+      </p:sp>
+    </p:spTree>
+    <p:extLst>
+      <p:ext uri="{BB962C8B-B14F-4D97-AF65-F5344CB8AC3E}">
+        <p14:creationId xmlns:p14="http://schemas.microsoft.com/office/powerpoint/2010/main" val="3004758916"/>
+      </p:ext>
+    </p:extLst>
+  </p:cSld>
+  <p:clrMapOvr>
+    <a:masterClrMapping/>
+  </p:clrMapOvr>
+</p:sld>
+</file>
+
+<file path=ppt/slides/slide5.xml><?xml version="1.0" encoding="utf-8"?>
+<p:sld xmlns:a="http://schemas.openxmlformats.org/drawingml/2006/main" xmlns:r="http://schemas.openxmlformats.org/officeDocument/2006/relationships" xmlns:p="http://schemas.openxmlformats.org/presentationml/2006/main">
+  <p:cSld>
+    <p:spTree>
+      <p:nvGrpSpPr>
+        <p:cNvPr id="1" name=""/>
+        <p:cNvGrpSpPr/>
+        <p:nvPr/>
+      </p:nvGrpSpPr>
+      <p:grpSpPr>
+        <a:xfrm>
+          <a:off x="0" y="0"/>
+          <a:ext cx="0" cy="0"/>
+          <a:chOff x="0" y="0"/>
+          <a:chExt cx="0" cy="0"/>
+        </a:xfrm>
+      </p:grpSpPr>
+      <p:sp>
+        <p:nvSpPr>
+          <p:cNvPr id="2" name="Textfeld 1">
+            <a:extLst>
+              <a:ext uri="{FF2B5EF4-FFF2-40B4-BE49-F238E27FC236}">
+                <a16:creationId xmlns:a16="http://schemas.microsoft.com/office/drawing/2014/main" id="{2D2B97F8-3EE3-F51A-E077-230DE2CACCE5}"/>
+              </a:ext>
+            </a:extLst>
+          </p:cNvPr>
+          <p:cNvSpPr txBox="1"/>
+          <p:nvPr/>
+        </p:nvSpPr>
+        <p:spPr>
+          <a:xfrm>
+            <a:off x="254000" y="254000"/>
+            <a:ext cx="2857500" cy="6350000"/>
+          </a:xfrm>
+          <a:prstGeom prst="rect">
+            <a:avLst/>
+          </a:prstGeom>
+          <a:noFill/>
+          <a:ln>
+            <a:solidFill>
+              <a:srgbClr val="BFBFBF"/>
+            </a:solidFill>
+          </a:ln>
+        </p:spPr>
+        <p:txBody>
+          <a:bodyPr vert="horz" wrap="square" rtlCol="0">
+            <a:noAutofit/>
+          </a:bodyPr>
+          <a:lstStyle/>
+          <a:p>
+            <a:r>
+              <a:rPr lang="de-DE" sz="2900">
+                <a:latin typeface="Calibri" panose="020F0502020204030204" pitchFamily="34" charset="0"/>
+              </a:rPr>
+              <a:t>Shrunk 29 pt</a:t>
+            </a:r>
+          </a:p>
+          <a:p>
+            <a:r>
+              <a:rPr lang="de-DE" sz="2600">
+                <a:latin typeface="Calibri" panose="020F0502020204030204" pitchFamily="34" charset="0"/>
+              </a:rPr>
+              <a:t>Shrunk 26 pt</a:t>
+            </a:r>
+          </a:p>
+          <a:p>
+            <a:r>
+              <a:rPr lang="de-DE" sz="2500">
+                <a:latin typeface="Calibri" panose="020F0502020204030204" pitchFamily="34" charset="0"/>
+              </a:rPr>
+              <a:t>Shrunk 25 pt</a:t>
+            </a:r>
+          </a:p>
+          <a:p>
+            <a:r>
+              <a:rPr lang="de-DE" sz="2400">
+                <a:latin typeface="Calibri" panose="020F0502020204030204" pitchFamily="34" charset="0"/>
+              </a:rPr>
+              <a:t>Shrunk 24 pt</a:t>
+            </a:r>
+          </a:p>
+          <a:p>
+            <a:r>
+              <a:rPr lang="de-DE">
+                <a:latin typeface="Calibri" panose="020F0502020204030204" pitchFamily="34" charset="0"/>
+              </a:rPr>
+              <a:t>Shrunk 18 pt</a:t>
+            </a:r>
+          </a:p>
+          <a:p>
+            <a:r>
+              <a:rPr lang="de-DE" sz="1500">
+                <a:latin typeface="Calibri" panose="020F0502020204030204" pitchFamily="34" charset="0"/>
+              </a:rPr>
+              <a:t>Shrunk 15 pt</a:t>
+            </a:r>
+          </a:p>
+          <a:p>
+            <a:r>
+              <a:rPr lang="de-DE" sz="1100">
+                <a:latin typeface="Calibri" panose="020F0502020204030204" pitchFamily="34" charset="0"/>
+              </a:rPr>
+              <a:t>Shrunk 11 pt</a:t>
+            </a:r>
+          </a:p>
+        </p:txBody>
+      </p:sp>
+      <p:sp>
+        <p:nvSpPr>
+          <p:cNvPr id="3" name="Textfeld 2">
+            <a:extLst>
+              <a:ext uri="{FF2B5EF4-FFF2-40B4-BE49-F238E27FC236}">
+                <a16:creationId xmlns:a16="http://schemas.microsoft.com/office/drawing/2014/main" id="{63F57131-15A7-37DF-6576-D7A1BBE02264}"/>
+              </a:ext>
+            </a:extLst>
+          </p:cNvPr>
+          <p:cNvSpPr txBox="1"/>
+          <p:nvPr/>
+        </p:nvSpPr>
+        <p:spPr>
+          <a:xfrm>
+            <a:off x="3238500" y="254000"/>
+            <a:ext cx="2857500" cy="6350000"/>
+          </a:xfrm>
+          <a:prstGeom prst="rect">
+            <a:avLst/>
+          </a:prstGeom>
+          <a:noFill/>
+          <a:ln>
+            <a:solidFill>
+              <a:srgbClr val="BFBFBF"/>
+            </a:solidFill>
+          </a:ln>
+        </p:spPr>
+        <p:txBody>
+          <a:bodyPr vert="horz" wrap="square" rtlCol="0">
+            <a:normAutofit fontScale="90000"/>
+          </a:bodyPr>
+          <a:lstStyle/>
+          <a:p>
+            <a:r>
+              <a:rPr lang="de-DE" sz="2900">
+                <a:latin typeface="Calibri" panose="020F0502020204030204" pitchFamily="34" charset="0"/>
+              </a:rPr>
+              <a:t>Shrunk 29 pt</a:t>
+            </a:r>
+          </a:p>
+          <a:p>
+            <a:r>
+              <a:rPr lang="de-DE" sz="2600">
+                <a:latin typeface="Calibri" panose="020F0502020204030204" pitchFamily="34" charset="0"/>
+              </a:rPr>
+              <a:t>Shrunk 26 pt</a:t>
+            </a:r>
+          </a:p>
+          <a:p>
+            <a:r>
+              <a:rPr lang="de-DE" sz="2500">
+                <a:latin typeface="Calibri" panose="020F0502020204030204" pitchFamily="34" charset="0"/>
+              </a:rPr>
+              <a:t>Shrunk 25 pt</a:t>
+            </a:r>
+          </a:p>
+          <a:p>
+            <a:r>
+              <a:rPr lang="de-DE" sz="2400">
+                <a:latin typeface="Calibri" panose="020F0502020204030204" pitchFamily="34" charset="0"/>
+              </a:rPr>
+              <a:t>Shrunk 24 pt</a:t>
+            </a:r>
+          </a:p>
+          <a:p>
+            <a:r>
+              <a:rPr lang="de-DE">
+                <a:latin typeface="Calibri" panose="020F0502020204030204" pitchFamily="34" charset="0"/>
+              </a:rPr>
+              <a:t>Shrunk 18 pt</a:t>
+            </a:r>
+          </a:p>
+          <a:p>
+            <a:r>
+              <a:rPr lang="de-DE" sz="1500">
+                <a:latin typeface="Calibri" panose="020F0502020204030204" pitchFamily="34" charset="0"/>
+              </a:rPr>
+              <a:t>Shrunk 15 pt</a:t>
+            </a:r>
+          </a:p>
+          <a:p>
+            <a:r>
+              <a:rPr lang="de-DE" sz="1100">
+                <a:latin typeface="Calibri" panose="020F0502020204030204" pitchFamily="34" charset="0"/>
+              </a:rPr>
+              <a:t>Shrunk 11 pt</a:t>
+            </a:r>
+          </a:p>
+        </p:txBody>
+      </p:sp>
+      <p:sp>
+        <p:nvSpPr>
+          <p:cNvPr id="4" name="Textfeld 3">
+            <a:extLst>
+              <a:ext uri="{FF2B5EF4-FFF2-40B4-BE49-F238E27FC236}">
+                <a16:creationId xmlns:a16="http://schemas.microsoft.com/office/drawing/2014/main" id="{F0912CED-D439-6676-F80A-0EDA21723A0E}"/>
+              </a:ext>
+            </a:extLst>
+          </p:cNvPr>
+          <p:cNvSpPr txBox="1"/>
+          <p:nvPr/>
+        </p:nvSpPr>
+        <p:spPr>
+          <a:xfrm>
+            <a:off x="6223000" y="254000"/>
+            <a:ext cx="2857500" cy="6350000"/>
+          </a:xfrm>
+          <a:prstGeom prst="rect">
+            <a:avLst/>
+          </a:prstGeom>
+          <a:noFill/>
+          <a:ln>
+            <a:solidFill>
+              <a:srgbClr val="BFBFBF"/>
+            </a:solidFill>
+          </a:ln>
+        </p:spPr>
+        <p:txBody>
+          <a:bodyPr vert="horz" wrap="square" rtlCol="0">
+            <a:normAutofit fontScale="77500"/>
+          </a:bodyPr>
+          <a:lstStyle/>
+          <a:p>
+            <a:r>
+              <a:rPr lang="de-DE" sz="2900">
+                <a:latin typeface="Calibri" panose="020F0502020204030204" pitchFamily="34" charset="0"/>
+              </a:rPr>
+              <a:t>Shrunk 29 pt</a:t>
+            </a:r>
+          </a:p>
+          <a:p>
+            <a:r>
+              <a:rPr lang="de-DE" sz="2600">
+                <a:latin typeface="Calibri" panose="020F0502020204030204" pitchFamily="34" charset="0"/>
+              </a:rPr>
+              <a:t>Shrunk 26 pt</a:t>
+            </a:r>
+          </a:p>
+          <a:p>
+            <a:r>
+              <a:rPr lang="de-DE" sz="2500">
+                <a:latin typeface="Calibri" panose="020F0502020204030204" pitchFamily="34" charset="0"/>
+              </a:rPr>
+              <a:t>Shrunk 25 pt</a:t>
+            </a:r>
+          </a:p>
+          <a:p>
+            <a:r>
+              <a:rPr lang="de-DE" sz="2400">
+                <a:latin typeface="Calibri" panose="020F0502020204030204" pitchFamily="34" charset="0"/>
+              </a:rPr>
+              <a:t>Shrunk 24 pt</a:t>
+            </a:r>
+          </a:p>
+          <a:p>
+            <a:r>
+              <a:rPr lang="de-DE">
+                <a:latin typeface="Calibri" panose="020F0502020204030204" pitchFamily="34" charset="0"/>
+              </a:rPr>
+              <a:t>Shrunk 18 pt</a:t>
+            </a:r>
+          </a:p>
+          <a:p>
+            <a:r>
+              <a:rPr lang="de-DE" sz="1500">
+                <a:latin typeface="Calibri" panose="020F0502020204030204" pitchFamily="34" charset="0"/>
+              </a:rPr>
+              <a:t>Shrunk 15 pt</a:t>
+            </a:r>
+          </a:p>
+          <a:p>
+            <a:r>
+              <a:rPr lang="de-DE" sz="1100">
+                <a:latin typeface="Calibri" panose="020F0502020204030204" pitchFamily="34" charset="0"/>
+              </a:rPr>
+              <a:t>Shrunk 11 pt</a:t>
+            </a:r>
+          </a:p>
+        </p:txBody>
+      </p:sp>
+      <p:sp>
+        <p:nvSpPr>
+          <p:cNvPr id="5" name="Textfeld 4">
+            <a:extLst>
+              <a:ext uri="{FF2B5EF4-FFF2-40B4-BE49-F238E27FC236}">
+                <a16:creationId xmlns:a16="http://schemas.microsoft.com/office/drawing/2014/main" id="{5806A2BB-8862-99AA-DC37-26BC1A67D742}"/>
+              </a:ext>
+            </a:extLst>
+          </p:cNvPr>
+          <p:cNvSpPr txBox="1"/>
+          <p:nvPr/>
+        </p:nvSpPr>
+        <p:spPr>
+          <a:xfrm>
+            <a:off x="9207500" y="254000"/>
+            <a:ext cx="2857500" cy="6350000"/>
+          </a:xfrm>
+          <a:prstGeom prst="rect">
+            <a:avLst/>
+          </a:prstGeom>
+          <a:noFill/>
+          <a:ln>
+            <a:solidFill>
+              <a:srgbClr val="BFBFBF"/>
+            </a:solidFill>
+          </a:ln>
+        </p:spPr>
+        <p:txBody>
+          <a:bodyPr vert="horz" wrap="square" rtlCol="0">
+            <a:normAutofit fontScale="62500"/>
+          </a:bodyPr>
+          <a:lstStyle/>
+          <a:p>
+            <a:r>
+              <a:rPr lang="de-DE" sz="2900">
+                <a:latin typeface="Calibri" panose="020F0502020204030204" pitchFamily="34" charset="0"/>
+              </a:rPr>
+              <a:t>Shrunk 29 pt</a:t>
+            </a:r>
+          </a:p>
+          <a:p>
+            <a:r>
+              <a:rPr lang="de-DE" sz="2600">
+                <a:latin typeface="Calibri" panose="020F0502020204030204" pitchFamily="34" charset="0"/>
+              </a:rPr>
+              <a:t>Shrunk 26 pt</a:t>
+            </a:r>
+          </a:p>
+          <a:p>
+            <a:r>
+              <a:rPr lang="de-DE" sz="2500">
+                <a:latin typeface="Calibri" panose="020F0502020204030204" pitchFamily="34" charset="0"/>
+              </a:rPr>
+              <a:t>Shrunk 25 pt</a:t>
+            </a:r>
+          </a:p>
+          <a:p>
+            <a:r>
+              <a:rPr lang="de-DE" sz="2400">
+                <a:latin typeface="Calibri" panose="020F0502020204030204" pitchFamily="34" charset="0"/>
+              </a:rPr>
+              <a:t>Shrunk 24 pt</a:t>
+            </a:r>
+          </a:p>
+          <a:p>
+            <a:r>
+              <a:rPr lang="de-DE">
+                <a:latin typeface="Calibri" panose="020F0502020204030204" pitchFamily="34" charset="0"/>
+              </a:rPr>
+              <a:t>Shrunk 18 pt</a:t>
+            </a:r>
+          </a:p>
+          <a:p>
+            <a:r>
+              <a:rPr lang="de-DE" sz="1500">
+                <a:latin typeface="Calibri" panose="020F0502020204030204" pitchFamily="34" charset="0"/>
+              </a:rPr>
+              <a:t>Shrunk 15 pt</a:t>
+            </a:r>
+          </a:p>
+          <a:p>
+            <a:r>
+              <a:rPr lang="de-DE" sz="1100">
+                <a:latin typeface="Calibri" panose="020F0502020204030204" pitchFamily="34" charset="0"/>
+              </a:rPr>
+              <a:t>Shrunk 11 pt</a:t>
+            </a:r>
+          </a:p>
+        </p:txBody>
+      </p:sp>
+    </p:spTree>
+    <p:extLst>
+      <p:ext uri="{BB962C8B-B14F-4D97-AF65-F5344CB8AC3E}">
+        <p14:creationId xmlns:p14="http://schemas.microsoft.com/office/powerpoint/2010/main" val="2544765459"/>
+      </p:ext>
+    </p:extLst>
+  </p:cSld>
+  <p:clrMapOvr>
+    <a:masterClrMapping/>
+  </p:clrMapOvr>
+</p:sld>
+</file>
+
+<file path=ppt/slides/slide6.xml><?xml version="1.0" encoding="utf-8"?>
+<p:sld xmlns:a="http://schemas.openxmlformats.org/drawingml/2006/main" xmlns:r="http://schemas.openxmlformats.org/officeDocument/2006/relationships" xmlns:p="http://schemas.openxmlformats.org/presentationml/2006/main">
+  <p:cSld>
+    <p:spTree>
+      <p:nvGrpSpPr>
+        <p:cNvPr id="1" name=""/>
+        <p:cNvGrpSpPr/>
+        <p:nvPr/>
+      </p:nvGrpSpPr>
+      <p:grpSpPr>
+        <a:xfrm>
+          <a:off x="0" y="0"/>
+          <a:ext cx="0" cy="0"/>
+          <a:chOff x="0" y="0"/>
+          <a:chExt cx="0" cy="0"/>
+        </a:xfrm>
+      </p:grpSpPr>
+      <p:sp>
+        <p:nvSpPr>
+          <p:cNvPr id="2" name="Textfeld 1">
+            <a:extLst>
+              <a:ext uri="{FF2B5EF4-FFF2-40B4-BE49-F238E27FC236}">
+                <a16:creationId xmlns:a16="http://schemas.microsoft.com/office/drawing/2014/main" id="{C0F3C4DD-F547-F624-F45A-91373E7BF04E}"/>
+              </a:ext>
+            </a:extLst>
+          </p:cNvPr>
+          <p:cNvSpPr txBox="1"/>
+          <p:nvPr/>
+        </p:nvSpPr>
+        <p:spPr>
+          <a:xfrm>
+            <a:off x="381000" y="381000"/>
+            <a:ext cx="11430000" cy="369332"/>
+          </a:xfrm>
+          <a:prstGeom prst="rect">
+            <a:avLst/>
+          </a:prstGeom>
+          <a:noFill/>
+          <a:ln>
+            <a:solidFill>
+              <a:srgbClr val="BFBFBF"/>
+            </a:solidFill>
+          </a:ln>
+        </p:spPr>
+        <p:txBody>
+          <a:bodyPr vert="horz" wrap="square" rtlCol="0">
+            <a:noAutofit/>
+          </a:bodyPr>
+          <a:lstStyle/>
+          <a:p>
+            <a:r>
+              <a:rPr lang="es-ES" sz="4400">
+                <a:latin typeface="Bahnschrift" panose="020B0502040204020203" pitchFamily="34" charset="0"/>
+              </a:rPr>
+              <a:t>AVAWAYATAV To Wa Yo LT Te Vo P. F, r. y.</a:t>
+            </a:r>
+            <a:endParaRPr lang="de-DE" sz="4400">
+              <a:latin typeface="Bahnschrift" panose="020B0502040204020203" pitchFamily="34" charset="0"/>
+            </a:endParaRPr>
+          </a:p>
+        </p:txBody>
+      </p:sp>
+      <p:sp>
+        <p:nvSpPr>
+          <p:cNvPr id="3" name="Textfeld 2">
+            <a:extLst>
+              <a:ext uri="{FF2B5EF4-FFF2-40B4-BE49-F238E27FC236}">
+                <a16:creationId xmlns:a16="http://schemas.microsoft.com/office/drawing/2014/main" id="{B2AC258E-7459-CA05-EF68-375AF5CC78CA}"/>
+              </a:ext>
+            </a:extLst>
+          </p:cNvPr>
+          <p:cNvSpPr txBox="1"/>
+          <p:nvPr/>
+        </p:nvSpPr>
+        <p:spPr>
+          <a:xfrm>
+            <a:off x="381000" y="1905000"/>
+            <a:ext cx="11430000" cy="369332"/>
+          </a:xfrm>
+          <a:prstGeom prst="rect">
+            <a:avLst/>
+          </a:prstGeom>
+          <a:noFill/>
+          <a:ln>
+            <a:solidFill>
+              <a:srgbClr val="BFBFBF"/>
+            </a:solidFill>
+          </a:ln>
+        </p:spPr>
+        <p:txBody>
+          <a:bodyPr vert="horz" wrap="square" rtlCol="0">
+            <a:noAutofit/>
+          </a:bodyPr>
+          <a:lstStyle/>
+          <a:p>
+            <a:r>
+              <a:rPr lang="es-ES" sz="4400" b="1">
+                <a:latin typeface="Bahnschrift" panose="020B0502040204020203" pitchFamily="34" charset="0"/>
+              </a:rPr>
+              <a:t>AVAWAYATAV To Wa Yo LT Te Vo P. F, r. y.</a:t>
+            </a:r>
+            <a:endParaRPr lang="de-DE" sz="4400" b="1">
+              <a:latin typeface="Bahnschrift" panose="020B0502040204020203" pitchFamily="34" charset="0"/>
+            </a:endParaRPr>
+          </a:p>
+        </p:txBody>
+      </p:sp>
+      <p:sp>
+        <p:nvSpPr>
+          <p:cNvPr id="4" name="Textfeld 3">
+            <a:extLst>
+              <a:ext uri="{FF2B5EF4-FFF2-40B4-BE49-F238E27FC236}">
+                <a16:creationId xmlns:a16="http://schemas.microsoft.com/office/drawing/2014/main" id="{AA62E404-E21D-712E-534E-A4032AB8C080}"/>
+              </a:ext>
+            </a:extLst>
+          </p:cNvPr>
+          <p:cNvSpPr txBox="1"/>
+          <p:nvPr/>
+        </p:nvSpPr>
+        <p:spPr>
+          <a:xfrm>
+            <a:off x="381000" y="3429000"/>
+            <a:ext cx="11430000" cy="369332"/>
+          </a:xfrm>
+          <a:prstGeom prst="rect">
+            <a:avLst/>
+          </a:prstGeom>
+          <a:noFill/>
+          <a:ln>
+            <a:solidFill>
+              <a:srgbClr val="BFBFBF"/>
+            </a:solidFill>
+          </a:ln>
+        </p:spPr>
+        <p:txBody>
+          <a:bodyPr vert="horz" wrap="square" rtlCol="0">
+            <a:noAutofit/>
+          </a:bodyPr>
+          <a:lstStyle/>
+          <a:p>
+            <a:r>
+              <a:rPr lang="es-ES" sz="4400">
+                <a:latin typeface="Gabriola" panose="04040605051002020D02" pitchFamily="82" charset="0"/>
+              </a:rPr>
+              <a:t>AVAWAYATAV To Wa Yo LT Te Vo P. F, r. y.</a:t>
+            </a:r>
+            <a:endParaRPr lang="de-DE" sz="4400">
+              <a:latin typeface="Gabriola" panose="04040605051002020D02" pitchFamily="82" charset="0"/>
+            </a:endParaRPr>
+          </a:p>
+        </p:txBody>
+      </p:sp>
+    </p:spTree>
+    <p:extLst>
+      <p:ext uri="{BB962C8B-B14F-4D97-AF65-F5344CB8AC3E}">
+        <p14:creationId xmlns:p14="http://schemas.microsoft.com/office/powerpoint/2010/main" val="488090364"/>
+      </p:ext>
+    </p:extLst>
+  </p:cSld>
+  <p:clrMapOvr>
+    <a:masterClrMapping/>
+  </p:clrMapOvr>
+</p:sld>
+</file>
+
+<file path=ppt/slides/slide7.xml><?xml version="1.0" encoding="utf-8"?>
+<p:sld xmlns:a="http://schemas.openxmlformats.org/drawingml/2006/main" xmlns:r="http://schemas.openxmlformats.org/officeDocument/2006/relationships" xmlns:p="http://schemas.openxmlformats.org/presentationml/2006/main">
+  <p:cSld>
+    <p:spTree>
+      <p:nvGrpSpPr>
+        <p:cNvPr id="1" name=""/>
+        <p:cNvGrpSpPr/>
+        <p:nvPr/>
+      </p:nvGrpSpPr>
+      <p:grpSpPr>
+        <a:xfrm>
+          <a:off x="0" y="0"/>
+          <a:ext cx="0" cy="0"/>
+          <a:chOff x="0" y="0"/>
+          <a:chExt cx="0" cy="0"/>
+        </a:xfrm>
+      </p:grpSpPr>
+      <p:sp>
+        <p:nvSpPr>
+          <p:cNvPr id="2" name="Textfeld 1">
+            <a:extLst>
+              <a:ext uri="{FF2B5EF4-FFF2-40B4-BE49-F238E27FC236}">
+                <a16:creationId xmlns:a16="http://schemas.microsoft.com/office/drawing/2014/main" id="{26171B7D-6E6F-5A73-CB93-5627C3C52C48}"/>
+              </a:ext>
+            </a:extLst>
+          </p:cNvPr>
+          <p:cNvSpPr txBox="1"/>
+          <p:nvPr/>
+        </p:nvSpPr>
+        <p:spPr>
+          <a:xfrm>
+            <a:off x="381000" y="381000"/>
+            <a:ext cx="5588000" cy="369332"/>
+          </a:xfrm>
+          <a:prstGeom prst="rect">
+            <a:avLst/>
+          </a:prstGeom>
+          <a:noFill/>
+          <a:ln>
+            <a:solidFill>
+              <a:srgbClr val="BFBFBF"/>
+            </a:solidFill>
+          </a:ln>
+        </p:spPr>
+        <p:txBody>
+          <a:bodyPr vert="horz" wrap="square" rtlCol="0">
+            <a:noAutofit/>
+          </a:bodyPr>
+          <a:lstStyle/>
+          <a:p>
+            <a:r>
+              <a:rPr lang="de-DE" sz="2800">
+                <a:latin typeface="SegoeUI"/>
+              </a:rPr>
+              <a:t>SegoeUI Diskussion</a:t>
+            </a:r>
+          </a:p>
+        </p:txBody>
+      </p:sp>
+      <p:sp>
+        <p:nvSpPr>
+          <p:cNvPr id="3" name="Textfeld 2">
+            <a:extLst>
+              <a:ext uri="{FF2B5EF4-FFF2-40B4-BE49-F238E27FC236}">
+                <a16:creationId xmlns:a16="http://schemas.microsoft.com/office/drawing/2014/main" id="{42E9D942-E654-9215-96A7-A4D55218026C}"/>
+              </a:ext>
+            </a:extLst>
+          </p:cNvPr>
+          <p:cNvSpPr txBox="1"/>
+          <p:nvPr/>
+        </p:nvSpPr>
+        <p:spPr>
+          <a:xfrm>
+            <a:off x="381000" y="1905000"/>
+            <a:ext cx="5588000" cy="369332"/>
+          </a:xfrm>
+          <a:prstGeom prst="rect">
+            <a:avLst/>
+          </a:prstGeom>
+          <a:noFill/>
+          <a:ln>
+            <a:solidFill>
+              <a:srgbClr val="BFBFBF"/>
+            </a:solidFill>
+          </a:ln>
+        </p:spPr>
+        <p:txBody>
+          <a:bodyPr vert="horz" wrap="square" rtlCol="0">
+            <a:noAutofit/>
+          </a:bodyPr>
+          <a:lstStyle/>
+          <a:p>
+            <a:r>
+              <a:rPr lang="de-DE" sz="2800">
+                <a:latin typeface="ArialMT"/>
+              </a:rPr>
+              <a:t>ArialMT Diskussion</a:t>
+            </a:r>
+          </a:p>
+        </p:txBody>
+      </p:sp>
+      <p:sp>
+        <p:nvSpPr>
+          <p:cNvPr id="4" name="Textfeld 3">
+            <a:extLst>
+              <a:ext uri="{FF2B5EF4-FFF2-40B4-BE49-F238E27FC236}">
+                <a16:creationId xmlns:a16="http://schemas.microsoft.com/office/drawing/2014/main" id="{AD184657-8BFE-E8D6-F69C-2BC19A5E391F}"/>
+              </a:ext>
+            </a:extLst>
+          </p:cNvPr>
+          <p:cNvSpPr txBox="1"/>
+          <p:nvPr/>
+        </p:nvSpPr>
+        <p:spPr>
+          <a:xfrm>
+            <a:off x="381000" y="3429000"/>
+            <a:ext cx="5588000" cy="369332"/>
+          </a:xfrm>
+          <a:prstGeom prst="rect">
+            <a:avLst/>
+          </a:prstGeom>
+          <a:noFill/>
+          <a:ln>
+            <a:solidFill>
+              <a:srgbClr val="BFBFBF"/>
+            </a:solidFill>
+          </a:ln>
+        </p:spPr>
+        <p:txBody>
+          <a:bodyPr vert="horz" wrap="square" rtlCol="0">
+            <a:noAutofit/>
+          </a:bodyPr>
+          <a:lstStyle/>
+          <a:p>
+            <a:r>
+              <a:rPr lang="de-DE" sz="2800">
+                <a:latin typeface="TimesNewRomanPSMT"/>
+              </a:rPr>
+              <a:t>TimesNewRomanPSMT Diskussion</a:t>
+            </a:r>
+          </a:p>
+        </p:txBody>
+      </p:sp>
+      <p:sp>
+        <p:nvSpPr>
+          <p:cNvPr id="5" name="Textfeld 4">
+            <a:extLst>
+              <a:ext uri="{FF2B5EF4-FFF2-40B4-BE49-F238E27FC236}">
+                <a16:creationId xmlns:a16="http://schemas.microsoft.com/office/drawing/2014/main" id="{B06A0C48-E76D-198A-D1C1-84528C9F78EA}"/>
+              </a:ext>
+            </a:extLst>
+          </p:cNvPr>
+          <p:cNvSpPr txBox="1"/>
+          <p:nvPr/>
+        </p:nvSpPr>
+        <p:spPr>
+          <a:xfrm>
+            <a:off x="381000" y="4953000"/>
+            <a:ext cx="5588000" cy="369332"/>
+          </a:xfrm>
+          <a:prstGeom prst="rect">
+            <a:avLst/>
+          </a:prstGeom>
+          <a:noFill/>
+          <a:ln>
+            <a:solidFill>
+              <a:srgbClr val="BFBFBF"/>
+            </a:solidFill>
+          </a:ln>
+        </p:spPr>
+        <p:txBody>
+          <a:bodyPr vert="horz" wrap="square" rtlCol="0">
+            <a:noAutofit/>
+          </a:bodyPr>
+          <a:lstStyle/>
+          <a:p>
+            <a:r>
+              <a:rPr lang="de-DE" sz="2800">
+                <a:latin typeface="Georgia-Bold"/>
+              </a:rPr>
+              <a:t>Georgia-Bold Diskussion</a:t>
+            </a:r>
+          </a:p>
+        </p:txBody>
+      </p:sp>
+      <p:sp>
+        <p:nvSpPr>
+          <p:cNvPr id="6" name="Textfeld 5">
+            <a:extLst>
+              <a:ext uri="{FF2B5EF4-FFF2-40B4-BE49-F238E27FC236}">
+                <a16:creationId xmlns:a16="http://schemas.microsoft.com/office/drawing/2014/main" id="{E77AA394-BE94-6566-006A-B6D755B15EE6}"/>
+              </a:ext>
+            </a:extLst>
+          </p:cNvPr>
+          <p:cNvSpPr txBox="1"/>
+          <p:nvPr/>
+        </p:nvSpPr>
+        <p:spPr>
+          <a:xfrm>
+            <a:off x="6223000" y="381000"/>
+            <a:ext cx="5588000" cy="369332"/>
+          </a:xfrm>
+          <a:prstGeom prst="rect">
+            <a:avLst/>
+          </a:prstGeom>
+          <a:noFill/>
+          <a:ln>
+            <a:solidFill>
+              <a:srgbClr val="BFBFBF"/>
+            </a:solidFill>
+          </a:ln>
+        </p:spPr>
+        <p:txBody>
+          <a:bodyPr vert="horz" wrap="square" rtlCol="0">
+            <a:noAutofit/>
+          </a:bodyPr>
+          <a:lstStyle/>
+          <a:p>
+            <a:r>
+              <a:rPr lang="de-DE" sz="2800">
+                <a:latin typeface="TahomaBold"/>
+              </a:rPr>
+              <a:t>TahomaBold Diskussion</a:t>
+            </a:r>
+          </a:p>
+        </p:txBody>
+      </p:sp>
+      <p:sp>
+        <p:nvSpPr>
+          <p:cNvPr id="7" name="Textfeld 6">
+            <a:extLst>
+              <a:ext uri="{FF2B5EF4-FFF2-40B4-BE49-F238E27FC236}">
+                <a16:creationId xmlns:a16="http://schemas.microsoft.com/office/drawing/2014/main" id="{981E08E7-10E3-1917-C23D-5F7A5ACCCA9D}"/>
+              </a:ext>
+            </a:extLst>
+          </p:cNvPr>
+          <p:cNvSpPr txBox="1"/>
+          <p:nvPr/>
+        </p:nvSpPr>
+        <p:spPr>
+          <a:xfrm>
+            <a:off x="6223000" y="1905000"/>
+            <a:ext cx="5588000" cy="369332"/>
+          </a:xfrm>
+          <a:prstGeom prst="rect">
+            <a:avLst/>
+          </a:prstGeom>
+          <a:noFill/>
+          <a:ln>
+            <a:solidFill>
+              <a:srgbClr val="BFBFBF"/>
+            </a:solidFill>
+          </a:ln>
+        </p:spPr>
+        <p:txBody>
+          <a:bodyPr vert="horz" wrap="square" rtlCol="0">
+            <a:noAutofit/>
+          </a:bodyPr>
+          <a:lstStyle/>
+          <a:p>
+            <a:r>
+              <a:rPr lang="de-DE" sz="2800">
+                <a:latin typeface="Cambria Bold" panose="02040803050406030204" pitchFamily="18" charset="0"/>
+              </a:rPr>
+              <a:t>Cambria Bold Diskussion</a:t>
+            </a:r>
+          </a:p>
+        </p:txBody>
+      </p:sp>
+      <p:sp>
+        <p:nvSpPr>
+          <p:cNvPr id="8" name="Textfeld 7">
+            <a:extLst>
+              <a:ext uri="{FF2B5EF4-FFF2-40B4-BE49-F238E27FC236}">
+                <a16:creationId xmlns:a16="http://schemas.microsoft.com/office/drawing/2014/main" id="{EBA16320-9C71-7AD9-F6A8-C1966EC84E54}"/>
+              </a:ext>
+            </a:extLst>
+          </p:cNvPr>
+          <p:cNvSpPr txBox="1"/>
+          <p:nvPr/>
+        </p:nvSpPr>
+        <p:spPr>
+          <a:xfrm>
+            <a:off x="6223000" y="3429000"/>
+            <a:ext cx="5588000" cy="369332"/>
+          </a:xfrm>
+          <a:prstGeom prst="rect">
+            <a:avLst/>
+          </a:prstGeom>
+          <a:noFill/>
+          <a:ln>
+            <a:solidFill>
+              <a:srgbClr val="BFBFBF"/>
+            </a:solidFill>
+          </a:ln>
+        </p:spPr>
+        <p:txBody>
+          <a:bodyPr vert="horz" wrap="square" rtlCol="0">
+            <a:noAutofit/>
+          </a:bodyPr>
+          <a:lstStyle/>
+          <a:p>
+            <a:r>
+              <a:rPr lang="de-DE" sz="2800">
+                <a:latin typeface="CambriaMath"/>
+              </a:rPr>
+              <a:t>CambriaMath Diskussion</a:t>
+            </a:r>
+          </a:p>
+        </p:txBody>
+      </p:sp>
+      <p:sp>
+        <p:nvSpPr>
+          <p:cNvPr id="9" name="Textfeld 8">
+            <a:extLst>
+              <a:ext uri="{FF2B5EF4-FFF2-40B4-BE49-F238E27FC236}">
+                <a16:creationId xmlns:a16="http://schemas.microsoft.com/office/drawing/2014/main" id="{AF218777-81A1-ACDA-E0F8-BCBC048BCA51}"/>
+              </a:ext>
+            </a:extLst>
+          </p:cNvPr>
+          <p:cNvSpPr txBox="1"/>
+          <p:nvPr/>
+        </p:nvSpPr>
+        <p:spPr>
+          <a:xfrm>
+            <a:off x="6223000" y="4953000"/>
+            <a:ext cx="5588000" cy="369332"/>
+          </a:xfrm>
+          <a:prstGeom prst="rect">
+            <a:avLst/>
+          </a:prstGeom>
+          <a:noFill/>
+          <a:ln>
+            <a:solidFill>
+              <a:srgbClr val="BFBFBF"/>
+            </a:solidFill>
+          </a:ln>
+        </p:spPr>
+        <p:txBody>
+          <a:bodyPr vert="horz" wrap="square" rtlCol="0">
+            <a:noAutofit/>
+          </a:bodyPr>
+          <a:lstStyle/>
+          <a:p>
+            <a:r>
+              <a:rPr lang="de-DE" sz="2800">
+                <a:latin typeface="TahomaX"/>
+              </a:rPr>
+              <a:t>TahomaX Diskussion</a:t>
+            </a:r>
+          </a:p>
+        </p:txBody>
+      </p:sp>
+    </p:spTree>
+    <p:extLst>
+      <p:ext uri="{BB962C8B-B14F-4D97-AF65-F5344CB8AC3E}">
+        <p14:creationId xmlns:p14="http://schemas.microsoft.com/office/powerpoint/2010/main" val="485611484"/>
       </p:ext>
     </p:extLst>
   </p:cSld>

--- a/tests/corpus/pptx/generated/text-more.pptx
+++ b/tests/corpus/pptx/generated/text-more.pptx
@@ -12,6 +12,7 @@
     <p:sldId id="260" r:id="rId6"/>
     <p:sldId id="261" r:id="rId7"/>
     <p:sldId id="262" r:id="rId8"/>
+    <p:sldId id="263" r:id="rId9"/>
   </p:sldIdLst>
   <p:sldSz cx="12192000" cy="6858000"/>
   <p:notesSz cx="6858000" cy="9144000"/>
@@ -135,7 +136,7 @@
           <p:cNvPr id="2" name="Titel 1">
             <a:extLst>
               <a:ext uri="{FF2B5EF4-FFF2-40B4-BE49-F238E27FC236}">
-                <a16:creationId xmlns:a16="http://schemas.microsoft.com/office/drawing/2014/main" id="{6B3BD4BC-9D93-36E5-07EB-9C1FA781158D}"/>
+                <a16:creationId xmlns:a16="http://schemas.microsoft.com/office/drawing/2014/main" id="{729CDADB-39D2-0572-C8B1-06C35557BE51}"/>
               </a:ext>
             </a:extLst>
           </p:cNvPr>
@@ -172,7 +173,7 @@
           <p:cNvPr id="3" name="Untertitel 2">
             <a:extLst>
               <a:ext uri="{FF2B5EF4-FFF2-40B4-BE49-F238E27FC236}">
-                <a16:creationId xmlns:a16="http://schemas.microsoft.com/office/drawing/2014/main" id="{2F2F367A-FF8A-74F9-D1E3-30CF6E037886}"/>
+                <a16:creationId xmlns:a16="http://schemas.microsoft.com/office/drawing/2014/main" id="{9EA8EE21-C21A-EF20-A20C-4DF722071876}"/>
               </a:ext>
             </a:extLst>
           </p:cNvPr>
@@ -242,7 +243,7 @@
           <p:cNvPr id="4" name="Datumsplatzhalter 3">
             <a:extLst>
               <a:ext uri="{FF2B5EF4-FFF2-40B4-BE49-F238E27FC236}">
-                <a16:creationId xmlns:a16="http://schemas.microsoft.com/office/drawing/2014/main" id="{BE96B119-9E03-1B66-22B1-24D0D5E23A0F}"/>
+                <a16:creationId xmlns:a16="http://schemas.microsoft.com/office/drawing/2014/main" id="{60F32950-54D6-FB91-57AE-FFD90F4AD4E7}"/>
               </a:ext>
             </a:extLst>
           </p:cNvPr>
@@ -258,7 +259,7 @@
           <a:bodyPr/>
           <a:lstStyle/>
           <a:p>
-            <a:fld id="{0FDCCD1D-F1EA-4304-9187-62589EACD3D0}" type="datetimeFigureOut">
+            <a:fld id="{54B0518F-369F-4021-8069-C6BEE5FAEF1C}" type="datetimeFigureOut">
               <a:rPr lang="de-DE" smtClean="0"/>
               <a:t>10.10.2026</a:t>
             </a:fld>
@@ -271,7 +272,7 @@
           <p:cNvPr id="5" name="Fußzeilenplatzhalter 4">
             <a:extLst>
               <a:ext uri="{FF2B5EF4-FFF2-40B4-BE49-F238E27FC236}">
-                <a16:creationId xmlns:a16="http://schemas.microsoft.com/office/drawing/2014/main" id="{FCDD682E-2D61-664F-9706-DC32E71EEC3C}"/>
+                <a16:creationId xmlns:a16="http://schemas.microsoft.com/office/drawing/2014/main" id="{AF9837B5-08BE-F01F-5339-B51636268B3A}"/>
               </a:ext>
             </a:extLst>
           </p:cNvPr>
@@ -296,7 +297,7 @@
           <p:cNvPr id="6" name="Foliennummernplatzhalter 5">
             <a:extLst>
               <a:ext uri="{FF2B5EF4-FFF2-40B4-BE49-F238E27FC236}">
-                <a16:creationId xmlns:a16="http://schemas.microsoft.com/office/drawing/2014/main" id="{C3583EA9-653E-7CC1-F197-D34F7EC85E04}"/>
+                <a16:creationId xmlns:a16="http://schemas.microsoft.com/office/drawing/2014/main" id="{52029F17-EC62-D0CB-A99C-FA0F557D94BC}"/>
               </a:ext>
             </a:extLst>
           </p:cNvPr>
@@ -312,7 +313,7 @@
           <a:bodyPr/>
           <a:lstStyle/>
           <a:p>
-            <a:fld id="{88063640-3A8E-482B-98FA-57CF740BEB7B}" type="slidenum">
+            <a:fld id="{FCE26AC5-30F7-48EE-84F7-2E4C64DFBE8C}" type="slidenum">
               <a:rPr lang="de-DE" smtClean="0"/>
               <a:t>‹Nr.›</a:t>
             </a:fld>
@@ -323,7 +324,7 @@
     </p:spTree>
     <p:extLst>
       <p:ext uri="{BB962C8B-B14F-4D97-AF65-F5344CB8AC3E}">
-        <p14:creationId xmlns:p14="http://schemas.microsoft.com/office/powerpoint/2010/main" val="533650542"/>
+        <p14:creationId xmlns:p14="http://schemas.microsoft.com/office/powerpoint/2010/main" val="3480367423"/>
       </p:ext>
     </p:extLst>
   </p:cSld>
@@ -355,7 +356,7 @@
           <p:cNvPr id="2" name="Titel 1">
             <a:extLst>
               <a:ext uri="{FF2B5EF4-FFF2-40B4-BE49-F238E27FC236}">
-                <a16:creationId xmlns:a16="http://schemas.microsoft.com/office/drawing/2014/main" id="{40E0FE0D-798E-DDBF-D6B8-0FD9D60DE914}"/>
+                <a16:creationId xmlns:a16="http://schemas.microsoft.com/office/drawing/2014/main" id="{0725917D-CE81-8D16-4634-9F02D7594699}"/>
               </a:ext>
             </a:extLst>
           </p:cNvPr>
@@ -383,7 +384,7 @@
           <p:cNvPr id="3" name="Vertikaler Textplatzhalter 2">
             <a:extLst>
               <a:ext uri="{FF2B5EF4-FFF2-40B4-BE49-F238E27FC236}">
-                <a16:creationId xmlns:a16="http://schemas.microsoft.com/office/drawing/2014/main" id="{37077DF5-A62D-3903-69D3-C4C3910AD1D3}"/>
+                <a16:creationId xmlns:a16="http://schemas.microsoft.com/office/drawing/2014/main" id="{A92583A4-85E9-C6E9-606D-5BFC6F8C7518}"/>
               </a:ext>
             </a:extLst>
           </p:cNvPr>
@@ -440,7 +441,7 @@
           <p:cNvPr id="4" name="Datumsplatzhalter 3">
             <a:extLst>
               <a:ext uri="{FF2B5EF4-FFF2-40B4-BE49-F238E27FC236}">
-                <a16:creationId xmlns:a16="http://schemas.microsoft.com/office/drawing/2014/main" id="{F4DA3DF5-22C4-3739-ED05-7AB4CD771FF1}"/>
+                <a16:creationId xmlns:a16="http://schemas.microsoft.com/office/drawing/2014/main" id="{84F707E2-8EA2-8D38-0297-3267C2E8CDD7}"/>
               </a:ext>
             </a:extLst>
           </p:cNvPr>
@@ -456,7 +457,7 @@
           <a:bodyPr/>
           <a:lstStyle/>
           <a:p>
-            <a:fld id="{0FDCCD1D-F1EA-4304-9187-62589EACD3D0}" type="datetimeFigureOut">
+            <a:fld id="{54B0518F-369F-4021-8069-C6BEE5FAEF1C}" type="datetimeFigureOut">
               <a:rPr lang="de-DE" smtClean="0"/>
               <a:t>10.10.2026</a:t>
             </a:fld>
@@ -469,7 +470,7 @@
           <p:cNvPr id="5" name="Fußzeilenplatzhalter 4">
             <a:extLst>
               <a:ext uri="{FF2B5EF4-FFF2-40B4-BE49-F238E27FC236}">
-                <a16:creationId xmlns:a16="http://schemas.microsoft.com/office/drawing/2014/main" id="{B93CF245-59C2-6F8B-AF5F-A03B125C866B}"/>
+                <a16:creationId xmlns:a16="http://schemas.microsoft.com/office/drawing/2014/main" id="{2470D40A-D225-C4D3-A2B0-51A837494CA0}"/>
               </a:ext>
             </a:extLst>
           </p:cNvPr>
@@ -494,7 +495,7 @@
           <p:cNvPr id="6" name="Foliennummernplatzhalter 5">
             <a:extLst>
               <a:ext uri="{FF2B5EF4-FFF2-40B4-BE49-F238E27FC236}">
-                <a16:creationId xmlns:a16="http://schemas.microsoft.com/office/drawing/2014/main" id="{DA4639A4-E055-446F-76DD-6E2A0E177566}"/>
+                <a16:creationId xmlns:a16="http://schemas.microsoft.com/office/drawing/2014/main" id="{955A17B2-4889-E175-0B72-2F18E29F7565}"/>
               </a:ext>
             </a:extLst>
           </p:cNvPr>
@@ -510,7 +511,7 @@
           <a:bodyPr/>
           <a:lstStyle/>
           <a:p>
-            <a:fld id="{88063640-3A8E-482B-98FA-57CF740BEB7B}" type="slidenum">
+            <a:fld id="{FCE26AC5-30F7-48EE-84F7-2E4C64DFBE8C}" type="slidenum">
               <a:rPr lang="de-DE" smtClean="0"/>
               <a:t>‹Nr.›</a:t>
             </a:fld>
@@ -521,7 +522,7 @@
     </p:spTree>
     <p:extLst>
       <p:ext uri="{BB962C8B-B14F-4D97-AF65-F5344CB8AC3E}">
-        <p14:creationId xmlns:p14="http://schemas.microsoft.com/office/powerpoint/2010/main" val="2294695253"/>
+        <p14:creationId xmlns:p14="http://schemas.microsoft.com/office/powerpoint/2010/main" val="1100330782"/>
       </p:ext>
     </p:extLst>
   </p:cSld>
@@ -553,7 +554,7 @@
           <p:cNvPr id="2" name="Vertikaler Titel 1">
             <a:extLst>
               <a:ext uri="{FF2B5EF4-FFF2-40B4-BE49-F238E27FC236}">
-                <a16:creationId xmlns:a16="http://schemas.microsoft.com/office/drawing/2014/main" id="{30F5B7BA-B293-70D9-6281-E570A73D0FE9}"/>
+                <a16:creationId xmlns:a16="http://schemas.microsoft.com/office/drawing/2014/main" id="{B6FA7829-DCA1-7219-11B7-585528EC1A74}"/>
               </a:ext>
             </a:extLst>
           </p:cNvPr>
@@ -586,7 +587,7 @@
           <p:cNvPr id="3" name="Vertikaler Textplatzhalter 2">
             <a:extLst>
               <a:ext uri="{FF2B5EF4-FFF2-40B4-BE49-F238E27FC236}">
-                <a16:creationId xmlns:a16="http://schemas.microsoft.com/office/drawing/2014/main" id="{540CCF6B-6377-019A-9441-49243A2BFD7A}"/>
+                <a16:creationId xmlns:a16="http://schemas.microsoft.com/office/drawing/2014/main" id="{F506E1AD-8765-08B9-9FB1-BFDA953EA27A}"/>
               </a:ext>
             </a:extLst>
           </p:cNvPr>
@@ -648,7 +649,7 @@
           <p:cNvPr id="4" name="Datumsplatzhalter 3">
             <a:extLst>
               <a:ext uri="{FF2B5EF4-FFF2-40B4-BE49-F238E27FC236}">
-                <a16:creationId xmlns:a16="http://schemas.microsoft.com/office/drawing/2014/main" id="{65B40D7A-29B3-79BA-7438-A20F2C34B79B}"/>
+                <a16:creationId xmlns:a16="http://schemas.microsoft.com/office/drawing/2014/main" id="{9922C89E-C680-E2E1-0ECD-6CF6769E13D0}"/>
               </a:ext>
             </a:extLst>
           </p:cNvPr>
@@ -664,7 +665,7 @@
           <a:bodyPr/>
           <a:lstStyle/>
           <a:p>
-            <a:fld id="{0FDCCD1D-F1EA-4304-9187-62589EACD3D0}" type="datetimeFigureOut">
+            <a:fld id="{54B0518F-369F-4021-8069-C6BEE5FAEF1C}" type="datetimeFigureOut">
               <a:rPr lang="de-DE" smtClean="0"/>
               <a:t>10.10.2026</a:t>
             </a:fld>
@@ -677,7 +678,7 @@
           <p:cNvPr id="5" name="Fußzeilenplatzhalter 4">
             <a:extLst>
               <a:ext uri="{FF2B5EF4-FFF2-40B4-BE49-F238E27FC236}">
-                <a16:creationId xmlns:a16="http://schemas.microsoft.com/office/drawing/2014/main" id="{3568C52F-89AC-B697-B946-3193F6156243}"/>
+                <a16:creationId xmlns:a16="http://schemas.microsoft.com/office/drawing/2014/main" id="{04931086-7AE4-08E9-2987-7AAF9D516A56}"/>
               </a:ext>
             </a:extLst>
           </p:cNvPr>
@@ -702,7 +703,7 @@
           <p:cNvPr id="6" name="Foliennummernplatzhalter 5">
             <a:extLst>
               <a:ext uri="{FF2B5EF4-FFF2-40B4-BE49-F238E27FC236}">
-                <a16:creationId xmlns:a16="http://schemas.microsoft.com/office/drawing/2014/main" id="{B5944170-1CBE-25B5-E75D-156F4502B253}"/>
+                <a16:creationId xmlns:a16="http://schemas.microsoft.com/office/drawing/2014/main" id="{52C0EEC9-A562-5F0B-8B9C-07E5320179FD}"/>
               </a:ext>
             </a:extLst>
           </p:cNvPr>
@@ -718,7 +719,7 @@
           <a:bodyPr/>
           <a:lstStyle/>
           <a:p>
-            <a:fld id="{88063640-3A8E-482B-98FA-57CF740BEB7B}" type="slidenum">
+            <a:fld id="{FCE26AC5-30F7-48EE-84F7-2E4C64DFBE8C}" type="slidenum">
               <a:rPr lang="de-DE" smtClean="0"/>
               <a:t>‹Nr.›</a:t>
             </a:fld>
@@ -729,7 +730,7 @@
     </p:spTree>
     <p:extLst>
       <p:ext uri="{BB962C8B-B14F-4D97-AF65-F5344CB8AC3E}">
-        <p14:creationId xmlns:p14="http://schemas.microsoft.com/office/powerpoint/2010/main" val="2403689175"/>
+        <p14:creationId xmlns:p14="http://schemas.microsoft.com/office/powerpoint/2010/main" val="34886501"/>
       </p:ext>
     </p:extLst>
   </p:cSld>
@@ -761,7 +762,7 @@
           <p:cNvPr id="2" name="Titel 1">
             <a:extLst>
               <a:ext uri="{FF2B5EF4-FFF2-40B4-BE49-F238E27FC236}">
-                <a16:creationId xmlns:a16="http://schemas.microsoft.com/office/drawing/2014/main" id="{B7CDE480-06C4-CFDE-1B0A-6824C7E2C5A4}"/>
+                <a16:creationId xmlns:a16="http://schemas.microsoft.com/office/drawing/2014/main" id="{BCB3FFAA-D54B-F455-4CA8-8ADFF94355C4}"/>
               </a:ext>
             </a:extLst>
           </p:cNvPr>
@@ -789,7 +790,7 @@
           <p:cNvPr id="3" name="Inhaltsplatzhalter 2">
             <a:extLst>
               <a:ext uri="{FF2B5EF4-FFF2-40B4-BE49-F238E27FC236}">
-                <a16:creationId xmlns:a16="http://schemas.microsoft.com/office/drawing/2014/main" id="{CA57CC3C-D6CA-3110-A25E-AFEBBDE3FCFD}"/>
+                <a16:creationId xmlns:a16="http://schemas.microsoft.com/office/drawing/2014/main" id="{77338D2A-AF07-4407-ED02-291A4706810F}"/>
               </a:ext>
             </a:extLst>
           </p:cNvPr>
@@ -846,7 +847,7 @@
           <p:cNvPr id="4" name="Datumsplatzhalter 3">
             <a:extLst>
               <a:ext uri="{FF2B5EF4-FFF2-40B4-BE49-F238E27FC236}">
-                <a16:creationId xmlns:a16="http://schemas.microsoft.com/office/drawing/2014/main" id="{30EF6327-2779-3A8B-8386-1F0E567AB7CD}"/>
+                <a16:creationId xmlns:a16="http://schemas.microsoft.com/office/drawing/2014/main" id="{70381BF6-BBB2-513D-40A1-5923743C7C09}"/>
               </a:ext>
             </a:extLst>
           </p:cNvPr>
@@ -862,7 +863,7 @@
           <a:bodyPr/>
           <a:lstStyle/>
           <a:p>
-            <a:fld id="{0FDCCD1D-F1EA-4304-9187-62589EACD3D0}" type="datetimeFigureOut">
+            <a:fld id="{54B0518F-369F-4021-8069-C6BEE5FAEF1C}" type="datetimeFigureOut">
               <a:rPr lang="de-DE" smtClean="0"/>
               <a:t>10.10.2026</a:t>
             </a:fld>
@@ -875,7 +876,7 @@
           <p:cNvPr id="5" name="Fußzeilenplatzhalter 4">
             <a:extLst>
               <a:ext uri="{FF2B5EF4-FFF2-40B4-BE49-F238E27FC236}">
-                <a16:creationId xmlns:a16="http://schemas.microsoft.com/office/drawing/2014/main" id="{273BC452-3C3D-57F2-3E12-BD075E086740}"/>
+                <a16:creationId xmlns:a16="http://schemas.microsoft.com/office/drawing/2014/main" id="{76D7AEA2-3BC4-D045-9C26-8DF969948502}"/>
               </a:ext>
             </a:extLst>
           </p:cNvPr>
@@ -900,7 +901,7 @@
           <p:cNvPr id="6" name="Foliennummernplatzhalter 5">
             <a:extLst>
               <a:ext uri="{FF2B5EF4-FFF2-40B4-BE49-F238E27FC236}">
-                <a16:creationId xmlns:a16="http://schemas.microsoft.com/office/drawing/2014/main" id="{1677BAE0-5372-BD32-AE1E-667C12107C64}"/>
+                <a16:creationId xmlns:a16="http://schemas.microsoft.com/office/drawing/2014/main" id="{24F76873-ACF9-2F03-3639-574FBA6399AC}"/>
               </a:ext>
             </a:extLst>
           </p:cNvPr>
@@ -916,7 +917,7 @@
           <a:bodyPr/>
           <a:lstStyle/>
           <a:p>
-            <a:fld id="{88063640-3A8E-482B-98FA-57CF740BEB7B}" type="slidenum">
+            <a:fld id="{FCE26AC5-30F7-48EE-84F7-2E4C64DFBE8C}" type="slidenum">
               <a:rPr lang="de-DE" smtClean="0"/>
               <a:t>‹Nr.›</a:t>
             </a:fld>
@@ -927,7 +928,7 @@
     </p:spTree>
     <p:extLst>
       <p:ext uri="{BB962C8B-B14F-4D97-AF65-F5344CB8AC3E}">
-        <p14:creationId xmlns:p14="http://schemas.microsoft.com/office/powerpoint/2010/main" val="2474709703"/>
+        <p14:creationId xmlns:p14="http://schemas.microsoft.com/office/powerpoint/2010/main" val="315895441"/>
       </p:ext>
     </p:extLst>
   </p:cSld>
@@ -959,7 +960,7 @@
           <p:cNvPr id="2" name="Titel 1">
             <a:extLst>
               <a:ext uri="{FF2B5EF4-FFF2-40B4-BE49-F238E27FC236}">
-                <a16:creationId xmlns:a16="http://schemas.microsoft.com/office/drawing/2014/main" id="{35A57B2E-00F7-93B4-4E6E-5B4EFFDDA672}"/>
+                <a16:creationId xmlns:a16="http://schemas.microsoft.com/office/drawing/2014/main" id="{44C2DD18-32DD-1173-00CB-14655CD7F82E}"/>
               </a:ext>
             </a:extLst>
           </p:cNvPr>
@@ -996,7 +997,7 @@
           <p:cNvPr id="3" name="Textplatzhalter 2">
             <a:extLst>
               <a:ext uri="{FF2B5EF4-FFF2-40B4-BE49-F238E27FC236}">
-                <a16:creationId xmlns:a16="http://schemas.microsoft.com/office/drawing/2014/main" id="{ACB7287D-50CF-3D31-ADDB-28F34250B344}"/>
+                <a16:creationId xmlns:a16="http://schemas.microsoft.com/office/drawing/2014/main" id="{26865EC0-02FF-1721-ADB2-C7414D99F497}"/>
               </a:ext>
             </a:extLst>
           </p:cNvPr>
@@ -1121,7 +1122,7 @@
           <p:cNvPr id="4" name="Datumsplatzhalter 3">
             <a:extLst>
               <a:ext uri="{FF2B5EF4-FFF2-40B4-BE49-F238E27FC236}">
-                <a16:creationId xmlns:a16="http://schemas.microsoft.com/office/drawing/2014/main" id="{E47C5637-97E8-E901-6A02-E0D19E3BAC12}"/>
+                <a16:creationId xmlns:a16="http://schemas.microsoft.com/office/drawing/2014/main" id="{BC90D543-DAC6-A31F-861F-6B9B8C0D4EDC}"/>
               </a:ext>
             </a:extLst>
           </p:cNvPr>
@@ -1137,7 +1138,7 @@
           <a:bodyPr/>
           <a:lstStyle/>
           <a:p>
-            <a:fld id="{0FDCCD1D-F1EA-4304-9187-62589EACD3D0}" type="datetimeFigureOut">
+            <a:fld id="{54B0518F-369F-4021-8069-C6BEE5FAEF1C}" type="datetimeFigureOut">
               <a:rPr lang="de-DE" smtClean="0"/>
               <a:t>10.10.2026</a:t>
             </a:fld>
@@ -1150,7 +1151,7 @@
           <p:cNvPr id="5" name="Fußzeilenplatzhalter 4">
             <a:extLst>
               <a:ext uri="{FF2B5EF4-FFF2-40B4-BE49-F238E27FC236}">
-                <a16:creationId xmlns:a16="http://schemas.microsoft.com/office/drawing/2014/main" id="{A2971A10-D426-8EEE-DFFC-2462AE7F7CC0}"/>
+                <a16:creationId xmlns:a16="http://schemas.microsoft.com/office/drawing/2014/main" id="{77510148-E5B6-63E6-EBB7-2080D6631035}"/>
               </a:ext>
             </a:extLst>
           </p:cNvPr>
@@ -1175,7 +1176,7 @@
           <p:cNvPr id="6" name="Foliennummernplatzhalter 5">
             <a:extLst>
               <a:ext uri="{FF2B5EF4-FFF2-40B4-BE49-F238E27FC236}">
-                <a16:creationId xmlns:a16="http://schemas.microsoft.com/office/drawing/2014/main" id="{8B7DF1D1-50B6-D2AB-4F40-CEDEDC43812A}"/>
+                <a16:creationId xmlns:a16="http://schemas.microsoft.com/office/drawing/2014/main" id="{346CE182-C51C-BA5E-FD82-D9B015B822C9}"/>
               </a:ext>
             </a:extLst>
           </p:cNvPr>
@@ -1191,7 +1192,7 @@
           <a:bodyPr/>
           <a:lstStyle/>
           <a:p>
-            <a:fld id="{88063640-3A8E-482B-98FA-57CF740BEB7B}" type="slidenum">
+            <a:fld id="{FCE26AC5-30F7-48EE-84F7-2E4C64DFBE8C}" type="slidenum">
               <a:rPr lang="de-DE" smtClean="0"/>
               <a:t>‹Nr.›</a:t>
             </a:fld>
@@ -1202,7 +1203,7 @@
     </p:spTree>
     <p:extLst>
       <p:ext uri="{BB962C8B-B14F-4D97-AF65-F5344CB8AC3E}">
-        <p14:creationId xmlns:p14="http://schemas.microsoft.com/office/powerpoint/2010/main" val="3336073451"/>
+        <p14:creationId xmlns:p14="http://schemas.microsoft.com/office/powerpoint/2010/main" val="779707127"/>
       </p:ext>
     </p:extLst>
   </p:cSld>
@@ -1234,7 +1235,7 @@
           <p:cNvPr id="2" name="Titel 1">
             <a:extLst>
               <a:ext uri="{FF2B5EF4-FFF2-40B4-BE49-F238E27FC236}">
-                <a16:creationId xmlns:a16="http://schemas.microsoft.com/office/drawing/2014/main" id="{1C1C4D9D-D7C9-F158-1AF1-3CB900689296}"/>
+                <a16:creationId xmlns:a16="http://schemas.microsoft.com/office/drawing/2014/main" id="{A7E1AA9B-3ED2-430D-AE77-549B37233F72}"/>
               </a:ext>
             </a:extLst>
           </p:cNvPr>
@@ -1262,7 +1263,7 @@
           <p:cNvPr id="3" name="Inhaltsplatzhalter 2">
             <a:extLst>
               <a:ext uri="{FF2B5EF4-FFF2-40B4-BE49-F238E27FC236}">
-                <a16:creationId xmlns:a16="http://schemas.microsoft.com/office/drawing/2014/main" id="{5DD78AE4-9101-DECF-2DBE-ED75A91AEC3F}"/>
+                <a16:creationId xmlns:a16="http://schemas.microsoft.com/office/drawing/2014/main" id="{367EC953-C236-8952-6AF4-7914939F6CF2}"/>
               </a:ext>
             </a:extLst>
           </p:cNvPr>
@@ -1324,7 +1325,7 @@
           <p:cNvPr id="4" name="Inhaltsplatzhalter 3">
             <a:extLst>
               <a:ext uri="{FF2B5EF4-FFF2-40B4-BE49-F238E27FC236}">
-                <a16:creationId xmlns:a16="http://schemas.microsoft.com/office/drawing/2014/main" id="{D9E1502E-5F97-0986-7F5B-9F2C772AFB9C}"/>
+                <a16:creationId xmlns:a16="http://schemas.microsoft.com/office/drawing/2014/main" id="{1173F28D-F195-67E7-47E4-B5035E15BE90}"/>
               </a:ext>
             </a:extLst>
           </p:cNvPr>
@@ -1386,7 +1387,7 @@
           <p:cNvPr id="5" name="Datumsplatzhalter 4">
             <a:extLst>
               <a:ext uri="{FF2B5EF4-FFF2-40B4-BE49-F238E27FC236}">
-                <a16:creationId xmlns:a16="http://schemas.microsoft.com/office/drawing/2014/main" id="{E81799F0-C331-8694-829A-D1EFFF276B24}"/>
+                <a16:creationId xmlns:a16="http://schemas.microsoft.com/office/drawing/2014/main" id="{C296BBEA-82DA-5F3B-58CF-40FA7BAE6416}"/>
               </a:ext>
             </a:extLst>
           </p:cNvPr>
@@ -1402,7 +1403,7 @@
           <a:bodyPr/>
           <a:lstStyle/>
           <a:p>
-            <a:fld id="{0FDCCD1D-F1EA-4304-9187-62589EACD3D0}" type="datetimeFigureOut">
+            <a:fld id="{54B0518F-369F-4021-8069-C6BEE5FAEF1C}" type="datetimeFigureOut">
               <a:rPr lang="de-DE" smtClean="0"/>
               <a:t>10.10.2026</a:t>
             </a:fld>
@@ -1415,7 +1416,7 @@
           <p:cNvPr id="6" name="Fußzeilenplatzhalter 5">
             <a:extLst>
               <a:ext uri="{FF2B5EF4-FFF2-40B4-BE49-F238E27FC236}">
-                <a16:creationId xmlns:a16="http://schemas.microsoft.com/office/drawing/2014/main" id="{FCD92EC9-7780-5A45-1D7C-3B08F7BBFE6A}"/>
+                <a16:creationId xmlns:a16="http://schemas.microsoft.com/office/drawing/2014/main" id="{98A6FEB9-8D1C-5B6D-B961-6E3656635732}"/>
               </a:ext>
             </a:extLst>
           </p:cNvPr>
@@ -1440,7 +1441,7 @@
           <p:cNvPr id="7" name="Foliennummernplatzhalter 6">
             <a:extLst>
               <a:ext uri="{FF2B5EF4-FFF2-40B4-BE49-F238E27FC236}">
-                <a16:creationId xmlns:a16="http://schemas.microsoft.com/office/drawing/2014/main" id="{83C2F9DE-57DE-54E1-172F-E2B36284620D}"/>
+                <a16:creationId xmlns:a16="http://schemas.microsoft.com/office/drawing/2014/main" id="{6DC87FA4-5BB9-19B1-6B92-DFE143717DAC}"/>
               </a:ext>
             </a:extLst>
           </p:cNvPr>
@@ -1456,7 +1457,7 @@
           <a:bodyPr/>
           <a:lstStyle/>
           <a:p>
-            <a:fld id="{88063640-3A8E-482B-98FA-57CF740BEB7B}" type="slidenum">
+            <a:fld id="{FCE26AC5-30F7-48EE-84F7-2E4C64DFBE8C}" type="slidenum">
               <a:rPr lang="de-DE" smtClean="0"/>
               <a:t>‹Nr.›</a:t>
             </a:fld>
@@ -1467,7 +1468,7 @@
     </p:spTree>
     <p:extLst>
       <p:ext uri="{BB962C8B-B14F-4D97-AF65-F5344CB8AC3E}">
-        <p14:creationId xmlns:p14="http://schemas.microsoft.com/office/powerpoint/2010/main" val="944122798"/>
+        <p14:creationId xmlns:p14="http://schemas.microsoft.com/office/powerpoint/2010/main" val="2594251173"/>
       </p:ext>
     </p:extLst>
   </p:cSld>
@@ -1499,7 +1500,7 @@
           <p:cNvPr id="2" name="Titel 1">
             <a:extLst>
               <a:ext uri="{FF2B5EF4-FFF2-40B4-BE49-F238E27FC236}">
-                <a16:creationId xmlns:a16="http://schemas.microsoft.com/office/drawing/2014/main" id="{7941C0D5-8F6F-BDAF-F693-1DEEBE9F88A4}"/>
+                <a16:creationId xmlns:a16="http://schemas.microsoft.com/office/drawing/2014/main" id="{9F19AE43-544A-3B5C-D831-408C54EEC8FC}"/>
               </a:ext>
             </a:extLst>
           </p:cNvPr>
@@ -1532,7 +1533,7 @@
           <p:cNvPr id="3" name="Textplatzhalter 2">
             <a:extLst>
               <a:ext uri="{FF2B5EF4-FFF2-40B4-BE49-F238E27FC236}">
-                <a16:creationId xmlns:a16="http://schemas.microsoft.com/office/drawing/2014/main" id="{260326B9-F46A-2B12-8566-AA8DEFC299D1}"/>
+                <a16:creationId xmlns:a16="http://schemas.microsoft.com/office/drawing/2014/main" id="{8C2196B4-5373-34C3-325E-14DAF6BA3A3E}"/>
               </a:ext>
             </a:extLst>
           </p:cNvPr>
@@ -1603,7 +1604,7 @@
           <p:cNvPr id="4" name="Inhaltsplatzhalter 3">
             <a:extLst>
               <a:ext uri="{FF2B5EF4-FFF2-40B4-BE49-F238E27FC236}">
-                <a16:creationId xmlns:a16="http://schemas.microsoft.com/office/drawing/2014/main" id="{40E745BE-A4A0-144A-837C-45B83771F6AC}"/>
+                <a16:creationId xmlns:a16="http://schemas.microsoft.com/office/drawing/2014/main" id="{956842BC-1B5C-CFBA-FFF8-FEB276F09A64}"/>
               </a:ext>
             </a:extLst>
           </p:cNvPr>
@@ -1665,7 +1666,7 @@
           <p:cNvPr id="5" name="Textplatzhalter 4">
             <a:extLst>
               <a:ext uri="{FF2B5EF4-FFF2-40B4-BE49-F238E27FC236}">
-                <a16:creationId xmlns:a16="http://schemas.microsoft.com/office/drawing/2014/main" id="{CCF28EC7-8B29-19AF-F8C3-6BE5E5B483A7}"/>
+                <a16:creationId xmlns:a16="http://schemas.microsoft.com/office/drawing/2014/main" id="{E99C5C95-8127-EF50-C26B-6150CB58E5F3}"/>
               </a:ext>
             </a:extLst>
           </p:cNvPr>
@@ -1736,7 +1737,7 @@
           <p:cNvPr id="6" name="Inhaltsplatzhalter 5">
             <a:extLst>
               <a:ext uri="{FF2B5EF4-FFF2-40B4-BE49-F238E27FC236}">
-                <a16:creationId xmlns:a16="http://schemas.microsoft.com/office/drawing/2014/main" id="{64463F4E-DF34-A134-91F9-80D31D49E673}"/>
+                <a16:creationId xmlns:a16="http://schemas.microsoft.com/office/drawing/2014/main" id="{5564F640-6E63-755C-6A67-0E68FD03CEA2}"/>
               </a:ext>
             </a:extLst>
           </p:cNvPr>
@@ -1798,7 +1799,7 @@
           <p:cNvPr id="7" name="Datumsplatzhalter 6">
             <a:extLst>
               <a:ext uri="{FF2B5EF4-FFF2-40B4-BE49-F238E27FC236}">
-                <a16:creationId xmlns:a16="http://schemas.microsoft.com/office/drawing/2014/main" id="{36F02071-0F64-BFD2-03CB-31A84947ED27}"/>
+                <a16:creationId xmlns:a16="http://schemas.microsoft.com/office/drawing/2014/main" id="{982AC7CF-8930-3F2F-2953-D3272D591CAC}"/>
               </a:ext>
             </a:extLst>
           </p:cNvPr>
@@ -1814,7 +1815,7 @@
           <a:bodyPr/>
           <a:lstStyle/>
           <a:p>
-            <a:fld id="{0FDCCD1D-F1EA-4304-9187-62589EACD3D0}" type="datetimeFigureOut">
+            <a:fld id="{54B0518F-369F-4021-8069-C6BEE5FAEF1C}" type="datetimeFigureOut">
               <a:rPr lang="de-DE" smtClean="0"/>
               <a:t>10.10.2026</a:t>
             </a:fld>
@@ -1827,7 +1828,7 @@
           <p:cNvPr id="8" name="Fußzeilenplatzhalter 7">
             <a:extLst>
               <a:ext uri="{FF2B5EF4-FFF2-40B4-BE49-F238E27FC236}">
-                <a16:creationId xmlns:a16="http://schemas.microsoft.com/office/drawing/2014/main" id="{E94819A4-5334-9076-6CAD-F2539725B823}"/>
+                <a16:creationId xmlns:a16="http://schemas.microsoft.com/office/drawing/2014/main" id="{98F3B4AC-B07E-2001-C073-044FE62812E2}"/>
               </a:ext>
             </a:extLst>
           </p:cNvPr>
@@ -1852,7 +1853,7 @@
           <p:cNvPr id="9" name="Foliennummernplatzhalter 8">
             <a:extLst>
               <a:ext uri="{FF2B5EF4-FFF2-40B4-BE49-F238E27FC236}">
-                <a16:creationId xmlns:a16="http://schemas.microsoft.com/office/drawing/2014/main" id="{A01CE5CF-9FAD-91AC-571D-D2213EA33D2F}"/>
+                <a16:creationId xmlns:a16="http://schemas.microsoft.com/office/drawing/2014/main" id="{D5BE265D-C815-D183-0FE1-E1E530A556F1}"/>
               </a:ext>
             </a:extLst>
           </p:cNvPr>
@@ -1868,7 +1869,7 @@
           <a:bodyPr/>
           <a:lstStyle/>
           <a:p>
-            <a:fld id="{88063640-3A8E-482B-98FA-57CF740BEB7B}" type="slidenum">
+            <a:fld id="{FCE26AC5-30F7-48EE-84F7-2E4C64DFBE8C}" type="slidenum">
               <a:rPr lang="de-DE" smtClean="0"/>
               <a:t>‹Nr.›</a:t>
             </a:fld>
@@ -1879,7 +1880,7 @@
     </p:spTree>
     <p:extLst>
       <p:ext uri="{BB962C8B-B14F-4D97-AF65-F5344CB8AC3E}">
-        <p14:creationId xmlns:p14="http://schemas.microsoft.com/office/powerpoint/2010/main" val="2180826089"/>
+        <p14:creationId xmlns:p14="http://schemas.microsoft.com/office/powerpoint/2010/main" val="691901652"/>
       </p:ext>
     </p:extLst>
   </p:cSld>
@@ -1911,7 +1912,7 @@
           <p:cNvPr id="2" name="Titel 1">
             <a:extLst>
               <a:ext uri="{FF2B5EF4-FFF2-40B4-BE49-F238E27FC236}">
-                <a16:creationId xmlns:a16="http://schemas.microsoft.com/office/drawing/2014/main" id="{54EB200B-7AA6-C473-16B9-E71E6DEDD606}"/>
+                <a16:creationId xmlns:a16="http://schemas.microsoft.com/office/drawing/2014/main" id="{826E2524-F8D3-B587-F523-CF5E23C67B83}"/>
               </a:ext>
             </a:extLst>
           </p:cNvPr>
@@ -1939,7 +1940,7 @@
           <p:cNvPr id="3" name="Datumsplatzhalter 2">
             <a:extLst>
               <a:ext uri="{FF2B5EF4-FFF2-40B4-BE49-F238E27FC236}">
-                <a16:creationId xmlns:a16="http://schemas.microsoft.com/office/drawing/2014/main" id="{E6B2F3DC-0874-3986-1933-7B4FCFFDFD83}"/>
+                <a16:creationId xmlns:a16="http://schemas.microsoft.com/office/drawing/2014/main" id="{D330290B-2370-F9AF-C996-F091FCF1A2F8}"/>
               </a:ext>
             </a:extLst>
           </p:cNvPr>
@@ -1955,7 +1956,7 @@
           <a:bodyPr/>
           <a:lstStyle/>
           <a:p>
-            <a:fld id="{0FDCCD1D-F1EA-4304-9187-62589EACD3D0}" type="datetimeFigureOut">
+            <a:fld id="{54B0518F-369F-4021-8069-C6BEE5FAEF1C}" type="datetimeFigureOut">
               <a:rPr lang="de-DE" smtClean="0"/>
               <a:t>10.10.2026</a:t>
             </a:fld>
@@ -1968,7 +1969,7 @@
           <p:cNvPr id="4" name="Fußzeilenplatzhalter 3">
             <a:extLst>
               <a:ext uri="{FF2B5EF4-FFF2-40B4-BE49-F238E27FC236}">
-                <a16:creationId xmlns:a16="http://schemas.microsoft.com/office/drawing/2014/main" id="{A7B982B5-836C-904F-40FD-8E560E25D0F9}"/>
+                <a16:creationId xmlns:a16="http://schemas.microsoft.com/office/drawing/2014/main" id="{D4662C05-6768-1C41-95D8-354944B021BC}"/>
               </a:ext>
             </a:extLst>
           </p:cNvPr>
@@ -1993,7 +1994,7 @@
           <p:cNvPr id="5" name="Foliennummernplatzhalter 4">
             <a:extLst>
               <a:ext uri="{FF2B5EF4-FFF2-40B4-BE49-F238E27FC236}">
-                <a16:creationId xmlns:a16="http://schemas.microsoft.com/office/drawing/2014/main" id="{BE82DCCA-5D5C-41BA-DBA6-733606E98530}"/>
+                <a16:creationId xmlns:a16="http://schemas.microsoft.com/office/drawing/2014/main" id="{3AF4E9B0-6A12-88B3-FF89-B0090CBAB87F}"/>
               </a:ext>
             </a:extLst>
           </p:cNvPr>
@@ -2009,7 +2010,7 @@
           <a:bodyPr/>
           <a:lstStyle/>
           <a:p>
-            <a:fld id="{88063640-3A8E-482B-98FA-57CF740BEB7B}" type="slidenum">
+            <a:fld id="{FCE26AC5-30F7-48EE-84F7-2E4C64DFBE8C}" type="slidenum">
               <a:rPr lang="de-DE" smtClean="0"/>
               <a:t>‹Nr.›</a:t>
             </a:fld>
@@ -2020,7 +2021,7 @@
     </p:spTree>
     <p:extLst>
       <p:ext uri="{BB962C8B-B14F-4D97-AF65-F5344CB8AC3E}">
-        <p14:creationId xmlns:p14="http://schemas.microsoft.com/office/powerpoint/2010/main" val="106080652"/>
+        <p14:creationId xmlns:p14="http://schemas.microsoft.com/office/powerpoint/2010/main" val="815105506"/>
       </p:ext>
     </p:extLst>
   </p:cSld>
@@ -2052,7 +2053,7 @@
           <p:cNvPr id="2" name="Datumsplatzhalter 1">
             <a:extLst>
               <a:ext uri="{FF2B5EF4-FFF2-40B4-BE49-F238E27FC236}">
-                <a16:creationId xmlns:a16="http://schemas.microsoft.com/office/drawing/2014/main" id="{3F28F22B-C864-5099-4290-D9B43AF6BBF4}"/>
+                <a16:creationId xmlns:a16="http://schemas.microsoft.com/office/drawing/2014/main" id="{8DFB14B2-E3E0-5379-7B72-44DD8EC7F2BB}"/>
               </a:ext>
             </a:extLst>
           </p:cNvPr>
@@ -2068,7 +2069,7 @@
           <a:bodyPr/>
           <a:lstStyle/>
           <a:p>
-            <a:fld id="{0FDCCD1D-F1EA-4304-9187-62589EACD3D0}" type="datetimeFigureOut">
+            <a:fld id="{54B0518F-369F-4021-8069-C6BEE5FAEF1C}" type="datetimeFigureOut">
               <a:rPr lang="de-DE" smtClean="0"/>
               <a:t>10.10.2026</a:t>
             </a:fld>
@@ -2081,7 +2082,7 @@
           <p:cNvPr id="3" name="Fußzeilenplatzhalter 2">
             <a:extLst>
               <a:ext uri="{FF2B5EF4-FFF2-40B4-BE49-F238E27FC236}">
-                <a16:creationId xmlns:a16="http://schemas.microsoft.com/office/drawing/2014/main" id="{F5675EC5-D100-A132-25D2-5B053BF51BC5}"/>
+                <a16:creationId xmlns:a16="http://schemas.microsoft.com/office/drawing/2014/main" id="{FF5D53A8-7ADB-0517-BC36-91F6474D2382}"/>
               </a:ext>
             </a:extLst>
           </p:cNvPr>
@@ -2106,7 +2107,7 @@
           <p:cNvPr id="4" name="Foliennummernplatzhalter 3">
             <a:extLst>
               <a:ext uri="{FF2B5EF4-FFF2-40B4-BE49-F238E27FC236}">
-                <a16:creationId xmlns:a16="http://schemas.microsoft.com/office/drawing/2014/main" id="{97FDEC91-9C86-AD0E-C393-F091BDD2767C}"/>
+                <a16:creationId xmlns:a16="http://schemas.microsoft.com/office/drawing/2014/main" id="{E56A3A75-1CC5-B0C5-7055-AA22CB5137DC}"/>
               </a:ext>
             </a:extLst>
           </p:cNvPr>
@@ -2122,7 +2123,7 @@
           <a:bodyPr/>
           <a:lstStyle/>
           <a:p>
-            <a:fld id="{88063640-3A8E-482B-98FA-57CF740BEB7B}" type="slidenum">
+            <a:fld id="{FCE26AC5-30F7-48EE-84F7-2E4C64DFBE8C}" type="slidenum">
               <a:rPr lang="de-DE" smtClean="0"/>
               <a:t>‹Nr.›</a:t>
             </a:fld>
@@ -2133,7 +2134,7 @@
     </p:spTree>
     <p:extLst>
       <p:ext uri="{BB962C8B-B14F-4D97-AF65-F5344CB8AC3E}">
-        <p14:creationId xmlns:p14="http://schemas.microsoft.com/office/powerpoint/2010/main" val="2968622982"/>
+        <p14:creationId xmlns:p14="http://schemas.microsoft.com/office/powerpoint/2010/main" val="1338375706"/>
       </p:ext>
     </p:extLst>
   </p:cSld>
@@ -2165,7 +2166,7 @@
           <p:cNvPr id="2" name="Titel 1">
             <a:extLst>
               <a:ext uri="{FF2B5EF4-FFF2-40B4-BE49-F238E27FC236}">
-                <a16:creationId xmlns:a16="http://schemas.microsoft.com/office/drawing/2014/main" id="{20500B98-2FD6-6CE3-B937-7CA2542008B7}"/>
+                <a16:creationId xmlns:a16="http://schemas.microsoft.com/office/drawing/2014/main" id="{141ACDA3-24A3-1159-899B-7DA78C4F8D53}"/>
               </a:ext>
             </a:extLst>
           </p:cNvPr>
@@ -2202,7 +2203,7 @@
           <p:cNvPr id="3" name="Inhaltsplatzhalter 2">
             <a:extLst>
               <a:ext uri="{FF2B5EF4-FFF2-40B4-BE49-F238E27FC236}">
-                <a16:creationId xmlns:a16="http://schemas.microsoft.com/office/drawing/2014/main" id="{01AE5D46-53E3-32EA-23A0-7DC8B6ECE032}"/>
+                <a16:creationId xmlns:a16="http://schemas.microsoft.com/office/drawing/2014/main" id="{AF84CA03-7CC5-2531-F4C0-7F740089E5A6}"/>
               </a:ext>
             </a:extLst>
           </p:cNvPr>
@@ -2292,7 +2293,7 @@
           <p:cNvPr id="4" name="Textplatzhalter 3">
             <a:extLst>
               <a:ext uri="{FF2B5EF4-FFF2-40B4-BE49-F238E27FC236}">
-                <a16:creationId xmlns:a16="http://schemas.microsoft.com/office/drawing/2014/main" id="{3B021A4B-9B79-76E8-4588-9093FBCDF453}"/>
+                <a16:creationId xmlns:a16="http://schemas.microsoft.com/office/drawing/2014/main" id="{CF8018C2-DC25-830D-173B-71F2139AE826}"/>
               </a:ext>
             </a:extLst>
           </p:cNvPr>
@@ -2363,7 +2364,7 @@
           <p:cNvPr id="5" name="Datumsplatzhalter 4">
             <a:extLst>
               <a:ext uri="{FF2B5EF4-FFF2-40B4-BE49-F238E27FC236}">
-                <a16:creationId xmlns:a16="http://schemas.microsoft.com/office/drawing/2014/main" id="{483F4327-12CA-2788-8193-02E8A750A32F}"/>
+                <a16:creationId xmlns:a16="http://schemas.microsoft.com/office/drawing/2014/main" id="{C3277DA3-6877-0B6B-168D-59F9F75B49AB}"/>
               </a:ext>
             </a:extLst>
           </p:cNvPr>
@@ -2379,7 +2380,7 @@
           <a:bodyPr/>
           <a:lstStyle/>
           <a:p>
-            <a:fld id="{0FDCCD1D-F1EA-4304-9187-62589EACD3D0}" type="datetimeFigureOut">
+            <a:fld id="{54B0518F-369F-4021-8069-C6BEE5FAEF1C}" type="datetimeFigureOut">
               <a:rPr lang="de-DE" smtClean="0"/>
               <a:t>10.10.2026</a:t>
             </a:fld>
@@ -2392,7 +2393,7 @@
           <p:cNvPr id="6" name="Fußzeilenplatzhalter 5">
             <a:extLst>
               <a:ext uri="{FF2B5EF4-FFF2-40B4-BE49-F238E27FC236}">
-                <a16:creationId xmlns:a16="http://schemas.microsoft.com/office/drawing/2014/main" id="{D074C1CC-C86B-B61E-5129-51F7DFF3B831}"/>
+                <a16:creationId xmlns:a16="http://schemas.microsoft.com/office/drawing/2014/main" id="{64C2F0AF-4E1C-71C4-5F5A-15907DA28634}"/>
               </a:ext>
             </a:extLst>
           </p:cNvPr>
@@ -2417,7 +2418,7 @@
           <p:cNvPr id="7" name="Foliennummernplatzhalter 6">
             <a:extLst>
               <a:ext uri="{FF2B5EF4-FFF2-40B4-BE49-F238E27FC236}">
-                <a16:creationId xmlns:a16="http://schemas.microsoft.com/office/drawing/2014/main" id="{2A6DB4D8-5AF5-C910-B1F7-E311CB85F25E}"/>
+                <a16:creationId xmlns:a16="http://schemas.microsoft.com/office/drawing/2014/main" id="{F3A4529F-05C0-DB1C-4C88-9E2BC3B19F03}"/>
               </a:ext>
             </a:extLst>
           </p:cNvPr>
@@ -2433,7 +2434,7 @@
           <a:bodyPr/>
           <a:lstStyle/>
           <a:p>
-            <a:fld id="{88063640-3A8E-482B-98FA-57CF740BEB7B}" type="slidenum">
+            <a:fld id="{FCE26AC5-30F7-48EE-84F7-2E4C64DFBE8C}" type="slidenum">
               <a:rPr lang="de-DE" smtClean="0"/>
               <a:t>‹Nr.›</a:t>
             </a:fld>
@@ -2444,7 +2445,7 @@
     </p:spTree>
     <p:extLst>
       <p:ext uri="{BB962C8B-B14F-4D97-AF65-F5344CB8AC3E}">
-        <p14:creationId xmlns:p14="http://schemas.microsoft.com/office/powerpoint/2010/main" val="3602240467"/>
+        <p14:creationId xmlns:p14="http://schemas.microsoft.com/office/powerpoint/2010/main" val="536627677"/>
       </p:ext>
     </p:extLst>
   </p:cSld>
@@ -2476,7 +2477,7 @@
           <p:cNvPr id="2" name="Titel 1">
             <a:extLst>
               <a:ext uri="{FF2B5EF4-FFF2-40B4-BE49-F238E27FC236}">
-                <a16:creationId xmlns:a16="http://schemas.microsoft.com/office/drawing/2014/main" id="{B6A23B7B-FA93-1966-B54E-E3F82163E281}"/>
+                <a16:creationId xmlns:a16="http://schemas.microsoft.com/office/drawing/2014/main" id="{58956F2A-AEAF-4087-78C3-8F2A3FEDAD90}"/>
               </a:ext>
             </a:extLst>
           </p:cNvPr>
@@ -2513,7 +2514,7 @@
           <p:cNvPr id="3" name="Bildplatzhalter 2">
             <a:extLst>
               <a:ext uri="{FF2B5EF4-FFF2-40B4-BE49-F238E27FC236}">
-                <a16:creationId xmlns:a16="http://schemas.microsoft.com/office/drawing/2014/main" id="{8871064A-1C95-464A-A723-6E4CB3194485}"/>
+                <a16:creationId xmlns:a16="http://schemas.microsoft.com/office/drawing/2014/main" id="{C4C1F702-B853-8C5C-952C-28B46483BEC6}"/>
               </a:ext>
             </a:extLst>
           </p:cNvPr>
@@ -2580,7 +2581,7 @@
           <p:cNvPr id="4" name="Textplatzhalter 3">
             <a:extLst>
               <a:ext uri="{FF2B5EF4-FFF2-40B4-BE49-F238E27FC236}">
-                <a16:creationId xmlns:a16="http://schemas.microsoft.com/office/drawing/2014/main" id="{0CFD8EEC-4B11-9327-2B8E-F39C1902EB63}"/>
+                <a16:creationId xmlns:a16="http://schemas.microsoft.com/office/drawing/2014/main" id="{D800CCA3-AC02-7E03-2702-7062AE752A62}"/>
               </a:ext>
             </a:extLst>
           </p:cNvPr>
@@ -2651,7 +2652,7 @@
           <p:cNvPr id="5" name="Datumsplatzhalter 4">
             <a:extLst>
               <a:ext uri="{FF2B5EF4-FFF2-40B4-BE49-F238E27FC236}">
-                <a16:creationId xmlns:a16="http://schemas.microsoft.com/office/drawing/2014/main" id="{4A33724B-55E5-48A5-E00C-877AF30ED1D4}"/>
+                <a16:creationId xmlns:a16="http://schemas.microsoft.com/office/drawing/2014/main" id="{7C4B8F6F-2470-867C-A6B4-13717A4C92B0}"/>
               </a:ext>
             </a:extLst>
           </p:cNvPr>
@@ -2667,7 +2668,7 @@
           <a:bodyPr/>
           <a:lstStyle/>
           <a:p>
-            <a:fld id="{0FDCCD1D-F1EA-4304-9187-62589EACD3D0}" type="datetimeFigureOut">
+            <a:fld id="{54B0518F-369F-4021-8069-C6BEE5FAEF1C}" type="datetimeFigureOut">
               <a:rPr lang="de-DE" smtClean="0"/>
               <a:t>10.10.2026</a:t>
             </a:fld>
@@ -2680,7 +2681,7 @@
           <p:cNvPr id="6" name="Fußzeilenplatzhalter 5">
             <a:extLst>
               <a:ext uri="{FF2B5EF4-FFF2-40B4-BE49-F238E27FC236}">
-                <a16:creationId xmlns:a16="http://schemas.microsoft.com/office/drawing/2014/main" id="{90AB9BA5-1D62-1E70-8DC0-818A69B54D21}"/>
+                <a16:creationId xmlns:a16="http://schemas.microsoft.com/office/drawing/2014/main" id="{6035584C-2D92-6C10-1688-C64F57A65716}"/>
               </a:ext>
             </a:extLst>
           </p:cNvPr>
@@ -2705,7 +2706,7 @@
           <p:cNvPr id="7" name="Foliennummernplatzhalter 6">
             <a:extLst>
               <a:ext uri="{FF2B5EF4-FFF2-40B4-BE49-F238E27FC236}">
-                <a16:creationId xmlns:a16="http://schemas.microsoft.com/office/drawing/2014/main" id="{3A36A0FA-33A3-9B86-8B8C-715E34A27298}"/>
+                <a16:creationId xmlns:a16="http://schemas.microsoft.com/office/drawing/2014/main" id="{162B7997-D539-43D2-228A-1DF79BF2DD02}"/>
               </a:ext>
             </a:extLst>
           </p:cNvPr>
@@ -2721,7 +2722,7 @@
           <a:bodyPr/>
           <a:lstStyle/>
           <a:p>
-            <a:fld id="{88063640-3A8E-482B-98FA-57CF740BEB7B}" type="slidenum">
+            <a:fld id="{FCE26AC5-30F7-48EE-84F7-2E4C64DFBE8C}" type="slidenum">
               <a:rPr lang="de-DE" smtClean="0"/>
               <a:t>‹Nr.›</a:t>
             </a:fld>
@@ -2732,7 +2733,7 @@
     </p:spTree>
     <p:extLst>
       <p:ext uri="{BB962C8B-B14F-4D97-AF65-F5344CB8AC3E}">
-        <p14:creationId xmlns:p14="http://schemas.microsoft.com/office/powerpoint/2010/main" val="3666740135"/>
+        <p14:creationId xmlns:p14="http://schemas.microsoft.com/office/powerpoint/2010/main" val="1922229091"/>
       </p:ext>
     </p:extLst>
   </p:cSld>
@@ -2769,7 +2770,7 @@
           <p:cNvPr id="2" name="Titelplatzhalter 1">
             <a:extLst>
               <a:ext uri="{FF2B5EF4-FFF2-40B4-BE49-F238E27FC236}">
-                <a16:creationId xmlns:a16="http://schemas.microsoft.com/office/drawing/2014/main" id="{4FB32CFC-D876-D04F-0681-C349535912A3}"/>
+                <a16:creationId xmlns:a16="http://schemas.microsoft.com/office/drawing/2014/main" id="{58A4EA87-3D84-79F9-6E51-D4D3582B6B8D}"/>
               </a:ext>
             </a:extLst>
           </p:cNvPr>
@@ -2807,7 +2808,7 @@
           <p:cNvPr id="3" name="Textplatzhalter 2">
             <a:extLst>
               <a:ext uri="{FF2B5EF4-FFF2-40B4-BE49-F238E27FC236}">
-                <a16:creationId xmlns:a16="http://schemas.microsoft.com/office/drawing/2014/main" id="{089DC5CF-0134-F10E-B808-39C29C109989}"/>
+                <a16:creationId xmlns:a16="http://schemas.microsoft.com/office/drawing/2014/main" id="{833A15DC-06C4-AD72-B5CC-012DC152F02A}"/>
               </a:ext>
             </a:extLst>
           </p:cNvPr>
@@ -2874,7 +2875,7 @@
           <p:cNvPr id="4" name="Datumsplatzhalter 3">
             <a:extLst>
               <a:ext uri="{FF2B5EF4-FFF2-40B4-BE49-F238E27FC236}">
-                <a16:creationId xmlns:a16="http://schemas.microsoft.com/office/drawing/2014/main" id="{7450A409-026C-C09D-0D0E-EE7C4175E748}"/>
+                <a16:creationId xmlns:a16="http://schemas.microsoft.com/office/drawing/2014/main" id="{8D5777A3-2305-3B70-9A1F-BE6468530E2C}"/>
               </a:ext>
             </a:extLst>
           </p:cNvPr>
@@ -2908,7 +2909,7 @@
             </a:lvl1pPr>
           </a:lstStyle>
           <a:p>
-            <a:fld id="{0FDCCD1D-F1EA-4304-9187-62589EACD3D0}" type="datetimeFigureOut">
+            <a:fld id="{54B0518F-369F-4021-8069-C6BEE5FAEF1C}" type="datetimeFigureOut">
               <a:rPr lang="de-DE" smtClean="0"/>
               <a:t>10.10.2026</a:t>
             </a:fld>
@@ -2921,7 +2922,7 @@
           <p:cNvPr id="5" name="Fußzeilenplatzhalter 4">
             <a:extLst>
               <a:ext uri="{FF2B5EF4-FFF2-40B4-BE49-F238E27FC236}">
-                <a16:creationId xmlns:a16="http://schemas.microsoft.com/office/drawing/2014/main" id="{223F57D9-4E70-5378-8D61-0FF6B6B78BF7}"/>
+                <a16:creationId xmlns:a16="http://schemas.microsoft.com/office/drawing/2014/main" id="{31DDCE1A-A88D-3B2D-8E46-FE8E84890A98}"/>
               </a:ext>
             </a:extLst>
           </p:cNvPr>
@@ -2964,7 +2965,7 @@
           <p:cNvPr id="6" name="Foliennummernplatzhalter 5">
             <a:extLst>
               <a:ext uri="{FF2B5EF4-FFF2-40B4-BE49-F238E27FC236}">
-                <a16:creationId xmlns:a16="http://schemas.microsoft.com/office/drawing/2014/main" id="{A183BA7D-3B86-DAF6-AAA9-163EBB640EF6}"/>
+                <a16:creationId xmlns:a16="http://schemas.microsoft.com/office/drawing/2014/main" id="{E50C0D12-B24B-F960-B163-3E5BAEFE5818}"/>
               </a:ext>
             </a:extLst>
           </p:cNvPr>
@@ -2998,7 +2999,7 @@
             </a:lvl1pPr>
           </a:lstStyle>
           <a:p>
-            <a:fld id="{88063640-3A8E-482B-98FA-57CF740BEB7B}" type="slidenum">
+            <a:fld id="{FCE26AC5-30F7-48EE-84F7-2E4C64DFBE8C}" type="slidenum">
               <a:rPr lang="de-DE" smtClean="0"/>
               <a:t>‹Nr.›</a:t>
             </a:fld>
@@ -3009,7 +3010,7 @@
     </p:spTree>
     <p:extLst>
       <p:ext uri="{BB962C8B-B14F-4D97-AF65-F5344CB8AC3E}">
-        <p14:creationId xmlns:p14="http://schemas.microsoft.com/office/powerpoint/2010/main" val="3802083882"/>
+        <p14:creationId xmlns:p14="http://schemas.microsoft.com/office/powerpoint/2010/main" val="3625436923"/>
       </p:ext>
     </p:extLst>
   </p:cSld>
@@ -3332,7 +3333,7 @@
           <p:cNvPr id="2" name="Textfeld 1">
             <a:extLst>
               <a:ext uri="{FF2B5EF4-FFF2-40B4-BE49-F238E27FC236}">
-                <a16:creationId xmlns:a16="http://schemas.microsoft.com/office/drawing/2014/main" id="{733FA9DC-070B-9ECC-8FDD-960EE454B9B7}"/>
+                <a16:creationId xmlns:a16="http://schemas.microsoft.com/office/drawing/2014/main" id="{3D05268B-E4AA-BD8D-AC70-293E2902B07F}"/>
               </a:ext>
             </a:extLst>
           </p:cNvPr>
@@ -3384,7 +3385,7 @@
           <p:cNvPr id="3" name="Textfeld 2">
             <a:extLst>
               <a:ext uri="{FF2B5EF4-FFF2-40B4-BE49-F238E27FC236}">
-                <a16:creationId xmlns:a16="http://schemas.microsoft.com/office/drawing/2014/main" id="{E575FA3A-9E61-6649-5DF0-CD0AF14C7E7C}"/>
+                <a16:creationId xmlns:a16="http://schemas.microsoft.com/office/drawing/2014/main" id="{661839FE-C03F-2324-41AA-765A7DBF9B3C}"/>
               </a:ext>
             </a:extLst>
           </p:cNvPr>
@@ -3436,7 +3437,7 @@
           <p:cNvPr id="4" name="Textfeld 3">
             <a:extLst>
               <a:ext uri="{FF2B5EF4-FFF2-40B4-BE49-F238E27FC236}">
-                <a16:creationId xmlns:a16="http://schemas.microsoft.com/office/drawing/2014/main" id="{709CFD80-A241-E9F0-B41C-48CBC6F402B3}"/>
+                <a16:creationId xmlns:a16="http://schemas.microsoft.com/office/drawing/2014/main" id="{4056AC0A-7BF6-B579-0953-1B6CDD58D4D1}"/>
               </a:ext>
             </a:extLst>
           </p:cNvPr>
@@ -3488,7 +3489,7 @@
           <p:cNvPr id="5" name="Textfeld 4">
             <a:extLst>
               <a:ext uri="{FF2B5EF4-FFF2-40B4-BE49-F238E27FC236}">
-                <a16:creationId xmlns:a16="http://schemas.microsoft.com/office/drawing/2014/main" id="{89F0295A-EBC6-436B-E575-042842BBA0A4}"/>
+                <a16:creationId xmlns:a16="http://schemas.microsoft.com/office/drawing/2014/main" id="{8964C0C2-BAC0-B446-A612-45DEAB0484B5}"/>
               </a:ext>
             </a:extLst>
           </p:cNvPr>
@@ -3540,7 +3541,7 @@
           <p:cNvPr id="6" name="Textfeld 5">
             <a:extLst>
               <a:ext uri="{FF2B5EF4-FFF2-40B4-BE49-F238E27FC236}">
-                <a16:creationId xmlns:a16="http://schemas.microsoft.com/office/drawing/2014/main" id="{01CD44C1-2E19-002D-A397-49026B1D90C8}"/>
+                <a16:creationId xmlns:a16="http://schemas.microsoft.com/office/drawing/2014/main" id="{D97A78F4-F037-B195-A3C7-1E79F76CB9BE}"/>
               </a:ext>
             </a:extLst>
           </p:cNvPr>
@@ -3590,7 +3591,7 @@
     </p:spTree>
     <p:extLst>
       <p:ext uri="{BB962C8B-B14F-4D97-AF65-F5344CB8AC3E}">
-        <p14:creationId xmlns:p14="http://schemas.microsoft.com/office/powerpoint/2010/main" val="3728756671"/>
+        <p14:creationId xmlns:p14="http://schemas.microsoft.com/office/powerpoint/2010/main" val="4117527762"/>
       </p:ext>
     </p:extLst>
   </p:cSld>
@@ -3622,7 +3623,7 @@
           <p:cNvPr id="2" name="Textfeld 1">
             <a:extLst>
               <a:ext uri="{FF2B5EF4-FFF2-40B4-BE49-F238E27FC236}">
-                <a16:creationId xmlns:a16="http://schemas.microsoft.com/office/drawing/2014/main" id="{2B1C9BC4-C617-FEAA-3B00-DD6E9A32A45F}"/>
+                <a16:creationId xmlns:a16="http://schemas.microsoft.com/office/drawing/2014/main" id="{D411B9DA-E66E-D5CB-BEA8-23D723D86649}"/>
               </a:ext>
             </a:extLst>
           </p:cNvPr>
@@ -3707,7 +3708,7 @@
           <p:cNvPr id="3" name="Textfeld 2">
             <a:extLst>
               <a:ext uri="{FF2B5EF4-FFF2-40B4-BE49-F238E27FC236}">
-                <a16:creationId xmlns:a16="http://schemas.microsoft.com/office/drawing/2014/main" id="{8033781B-8C06-1994-E178-014292D33695}"/>
+                <a16:creationId xmlns:a16="http://schemas.microsoft.com/office/drawing/2014/main" id="{F4777803-6A95-9E7A-F09C-7CB6EBAC456C}"/>
               </a:ext>
             </a:extLst>
           </p:cNvPr>
@@ -3790,7 +3791,7 @@
     </p:spTree>
     <p:extLst>
       <p:ext uri="{BB962C8B-B14F-4D97-AF65-F5344CB8AC3E}">
-        <p14:creationId xmlns:p14="http://schemas.microsoft.com/office/powerpoint/2010/main" val="1108828140"/>
+        <p14:creationId xmlns:p14="http://schemas.microsoft.com/office/powerpoint/2010/main" val="532762137"/>
       </p:ext>
     </p:extLst>
   </p:cSld>
@@ -3822,7 +3823,7 @@
           <p:cNvPr id="2" name="Textfeld 1">
             <a:extLst>
               <a:ext uri="{FF2B5EF4-FFF2-40B4-BE49-F238E27FC236}">
-                <a16:creationId xmlns:a16="http://schemas.microsoft.com/office/drawing/2014/main" id="{48F19E98-9D3F-E12F-56FC-AEBAEC206055}"/>
+                <a16:creationId xmlns:a16="http://schemas.microsoft.com/office/drawing/2014/main" id="{5C845B73-3CFD-BD3D-5CBF-10ECE8F00523}"/>
               </a:ext>
             </a:extLst>
           </p:cNvPr>
@@ -3864,7 +3865,7 @@
           <p:cNvPr id="3" name="Textfeld 2">
             <a:extLst>
               <a:ext uri="{FF2B5EF4-FFF2-40B4-BE49-F238E27FC236}">
-                <a16:creationId xmlns:a16="http://schemas.microsoft.com/office/drawing/2014/main" id="{31893BE4-7A34-A1F7-ECB7-7C0D40D91BA6}"/>
+                <a16:creationId xmlns:a16="http://schemas.microsoft.com/office/drawing/2014/main" id="{82BF9329-49A2-15BE-1A13-7470333E5052}"/>
               </a:ext>
             </a:extLst>
           </p:cNvPr>
@@ -3906,7 +3907,7 @@
           <p:cNvPr id="4" name="Textfeld 3">
             <a:extLst>
               <a:ext uri="{FF2B5EF4-FFF2-40B4-BE49-F238E27FC236}">
-                <a16:creationId xmlns:a16="http://schemas.microsoft.com/office/drawing/2014/main" id="{F2BBD0F8-34AE-B1FB-A2D5-EB7B9655F884}"/>
+                <a16:creationId xmlns:a16="http://schemas.microsoft.com/office/drawing/2014/main" id="{E63405C8-1FB7-E382-637D-168E2591B2F0}"/>
               </a:ext>
             </a:extLst>
           </p:cNvPr>
@@ -3966,7 +3967,7 @@
           <p:cNvPr id="5" name="Textfeld 4">
             <a:extLst>
               <a:ext uri="{FF2B5EF4-FFF2-40B4-BE49-F238E27FC236}">
-                <a16:creationId xmlns:a16="http://schemas.microsoft.com/office/drawing/2014/main" id="{912D69AC-376C-0912-6E4B-4BE794EEC1E6}"/>
+                <a16:creationId xmlns:a16="http://schemas.microsoft.com/office/drawing/2014/main" id="{8A98202E-7A88-D3DA-A3F6-1FEDC09E7871}"/>
               </a:ext>
             </a:extLst>
           </p:cNvPr>
@@ -4024,7 +4025,7 @@
     </p:spTree>
     <p:extLst>
       <p:ext uri="{BB962C8B-B14F-4D97-AF65-F5344CB8AC3E}">
-        <p14:creationId xmlns:p14="http://schemas.microsoft.com/office/powerpoint/2010/main" val="2940620954"/>
+        <p14:creationId xmlns:p14="http://schemas.microsoft.com/office/powerpoint/2010/main" val="156113106"/>
       </p:ext>
     </p:extLst>
   </p:cSld>
@@ -4056,7 +4057,7 @@
           <p:cNvPr id="2" name="Textfeld 1">
             <a:extLst>
               <a:ext uri="{FF2B5EF4-FFF2-40B4-BE49-F238E27FC236}">
-                <a16:creationId xmlns:a16="http://schemas.microsoft.com/office/drawing/2014/main" id="{3FE8754E-EBDC-AF48-E9B4-A907E68F6C18}"/>
+                <a16:creationId xmlns:a16="http://schemas.microsoft.com/office/drawing/2014/main" id="{1532678E-6CCD-F497-C45C-E0C210F2E2A7}"/>
               </a:ext>
             </a:extLst>
           </p:cNvPr>
@@ -4155,7 +4156,7 @@
           <p:cNvPr id="3" name="Textfeld 2">
             <a:extLst>
               <a:ext uri="{FF2B5EF4-FFF2-40B4-BE49-F238E27FC236}">
-                <a16:creationId xmlns:a16="http://schemas.microsoft.com/office/drawing/2014/main" id="{6098F1D5-D1FD-24C5-52D1-27A453A24F58}"/>
+                <a16:creationId xmlns:a16="http://schemas.microsoft.com/office/drawing/2014/main" id="{D676C32B-1454-66C2-E033-C2ABA49C4C5A}"/>
               </a:ext>
             </a:extLst>
           </p:cNvPr>
@@ -4230,7 +4231,7 @@
           <p:cNvPr id="4" name="Textfeld 3">
             <a:extLst>
               <a:ext uri="{FF2B5EF4-FFF2-40B4-BE49-F238E27FC236}">
-                <a16:creationId xmlns:a16="http://schemas.microsoft.com/office/drawing/2014/main" id="{626B175B-BE17-F30A-13E6-45BD90B9B2F0}"/>
+                <a16:creationId xmlns:a16="http://schemas.microsoft.com/office/drawing/2014/main" id="{832F99C8-EFCA-A8F0-AB72-4BB918D79056}"/>
               </a:ext>
             </a:extLst>
           </p:cNvPr>
@@ -4307,7 +4308,7 @@
     </p:spTree>
     <p:extLst>
       <p:ext uri="{BB962C8B-B14F-4D97-AF65-F5344CB8AC3E}">
-        <p14:creationId xmlns:p14="http://schemas.microsoft.com/office/powerpoint/2010/main" val="3004758916"/>
+        <p14:creationId xmlns:p14="http://schemas.microsoft.com/office/powerpoint/2010/main" val="2734181850"/>
       </p:ext>
     </p:extLst>
   </p:cSld>
@@ -4339,7 +4340,7 @@
           <p:cNvPr id="2" name="Textfeld 1">
             <a:extLst>
               <a:ext uri="{FF2B5EF4-FFF2-40B4-BE49-F238E27FC236}">
-                <a16:creationId xmlns:a16="http://schemas.microsoft.com/office/drawing/2014/main" id="{2D2B97F8-3EE3-F51A-E077-230DE2CACCE5}"/>
+                <a16:creationId xmlns:a16="http://schemas.microsoft.com/office/drawing/2014/main" id="{694ABD88-6F37-8399-B01F-89146B3EFC88}"/>
               </a:ext>
             </a:extLst>
           </p:cNvPr>
@@ -4429,7 +4430,7 @@
           <p:cNvPr id="3" name="Textfeld 2">
             <a:extLst>
               <a:ext uri="{FF2B5EF4-FFF2-40B4-BE49-F238E27FC236}">
-                <a16:creationId xmlns:a16="http://schemas.microsoft.com/office/drawing/2014/main" id="{63F57131-15A7-37DF-6576-D7A1BBE02264}"/>
+                <a16:creationId xmlns:a16="http://schemas.microsoft.com/office/drawing/2014/main" id="{F5FBDE79-90CA-9416-9ED5-0ACD61350A0F}"/>
               </a:ext>
             </a:extLst>
           </p:cNvPr>
@@ -4519,7 +4520,7 @@
           <p:cNvPr id="4" name="Textfeld 3">
             <a:extLst>
               <a:ext uri="{FF2B5EF4-FFF2-40B4-BE49-F238E27FC236}">
-                <a16:creationId xmlns:a16="http://schemas.microsoft.com/office/drawing/2014/main" id="{F0912CED-D439-6676-F80A-0EDA21723A0E}"/>
+                <a16:creationId xmlns:a16="http://schemas.microsoft.com/office/drawing/2014/main" id="{6C94D627-4086-6121-247F-85317CB82A2D}"/>
               </a:ext>
             </a:extLst>
           </p:cNvPr>
@@ -4609,7 +4610,7 @@
           <p:cNvPr id="5" name="Textfeld 4">
             <a:extLst>
               <a:ext uri="{FF2B5EF4-FFF2-40B4-BE49-F238E27FC236}">
-                <a16:creationId xmlns:a16="http://schemas.microsoft.com/office/drawing/2014/main" id="{5806A2BB-8862-99AA-DC37-26BC1A67D742}"/>
+                <a16:creationId xmlns:a16="http://schemas.microsoft.com/office/drawing/2014/main" id="{8B4A06EA-06ED-6C9C-CAD6-C1C096E53FB9}"/>
               </a:ext>
             </a:extLst>
           </p:cNvPr>
@@ -4697,7 +4698,7 @@
     </p:spTree>
     <p:extLst>
       <p:ext uri="{BB962C8B-B14F-4D97-AF65-F5344CB8AC3E}">
-        <p14:creationId xmlns:p14="http://schemas.microsoft.com/office/powerpoint/2010/main" val="2544765459"/>
+        <p14:creationId xmlns:p14="http://schemas.microsoft.com/office/powerpoint/2010/main" val="1318257660"/>
       </p:ext>
     </p:extLst>
   </p:cSld>
@@ -4729,7 +4730,7 @@
           <p:cNvPr id="2" name="Textfeld 1">
             <a:extLst>
               <a:ext uri="{FF2B5EF4-FFF2-40B4-BE49-F238E27FC236}">
-                <a16:creationId xmlns:a16="http://schemas.microsoft.com/office/drawing/2014/main" id="{C0F3C4DD-F547-F624-F45A-91373E7BF04E}"/>
+                <a16:creationId xmlns:a16="http://schemas.microsoft.com/office/drawing/2014/main" id="{3B44C6AD-93BD-D821-8FA8-F3097CF7774D}"/>
               </a:ext>
             </a:extLst>
           </p:cNvPr>
@@ -4774,7 +4775,7 @@
           <p:cNvPr id="3" name="Textfeld 2">
             <a:extLst>
               <a:ext uri="{FF2B5EF4-FFF2-40B4-BE49-F238E27FC236}">
-                <a16:creationId xmlns:a16="http://schemas.microsoft.com/office/drawing/2014/main" id="{B2AC258E-7459-CA05-EF68-375AF5CC78CA}"/>
+                <a16:creationId xmlns:a16="http://schemas.microsoft.com/office/drawing/2014/main" id="{D2536595-DF46-CF47-0262-34198D8A80B3}"/>
               </a:ext>
             </a:extLst>
           </p:cNvPr>
@@ -4819,7 +4820,7 @@
           <p:cNvPr id="4" name="Textfeld 3">
             <a:extLst>
               <a:ext uri="{FF2B5EF4-FFF2-40B4-BE49-F238E27FC236}">
-                <a16:creationId xmlns:a16="http://schemas.microsoft.com/office/drawing/2014/main" id="{AA62E404-E21D-712E-534E-A4032AB8C080}"/>
+                <a16:creationId xmlns:a16="http://schemas.microsoft.com/office/drawing/2014/main" id="{45D610AC-D0CD-999D-997E-6BB3A3405183}"/>
               </a:ext>
             </a:extLst>
           </p:cNvPr>
@@ -4862,7 +4863,7 @@
     </p:spTree>
     <p:extLst>
       <p:ext uri="{BB962C8B-B14F-4D97-AF65-F5344CB8AC3E}">
-        <p14:creationId xmlns:p14="http://schemas.microsoft.com/office/powerpoint/2010/main" val="488090364"/>
+        <p14:creationId xmlns:p14="http://schemas.microsoft.com/office/powerpoint/2010/main" val="4044709468"/>
       </p:ext>
     </p:extLst>
   </p:cSld>
@@ -4894,7 +4895,7 @@
           <p:cNvPr id="2" name="Textfeld 1">
             <a:extLst>
               <a:ext uri="{FF2B5EF4-FFF2-40B4-BE49-F238E27FC236}">
-                <a16:creationId xmlns:a16="http://schemas.microsoft.com/office/drawing/2014/main" id="{26171B7D-6E6F-5A73-CB93-5627C3C52C48}"/>
+                <a16:creationId xmlns:a16="http://schemas.microsoft.com/office/drawing/2014/main" id="{32A20371-DD71-4015-D1AE-8D02AF1612F1}"/>
               </a:ext>
             </a:extLst>
           </p:cNvPr>
@@ -4936,7 +4937,7 @@
           <p:cNvPr id="3" name="Textfeld 2">
             <a:extLst>
               <a:ext uri="{FF2B5EF4-FFF2-40B4-BE49-F238E27FC236}">
-                <a16:creationId xmlns:a16="http://schemas.microsoft.com/office/drawing/2014/main" id="{42E9D942-E654-9215-96A7-A4D55218026C}"/>
+                <a16:creationId xmlns:a16="http://schemas.microsoft.com/office/drawing/2014/main" id="{11FBDC46-18C3-8BC5-CB09-2703480C2577}"/>
               </a:ext>
             </a:extLst>
           </p:cNvPr>
@@ -4978,7 +4979,7 @@
           <p:cNvPr id="4" name="Textfeld 3">
             <a:extLst>
               <a:ext uri="{FF2B5EF4-FFF2-40B4-BE49-F238E27FC236}">
-                <a16:creationId xmlns:a16="http://schemas.microsoft.com/office/drawing/2014/main" id="{AD184657-8BFE-E8D6-F69C-2BC19A5E391F}"/>
+                <a16:creationId xmlns:a16="http://schemas.microsoft.com/office/drawing/2014/main" id="{167AF5C9-4E56-BB8C-FE88-8BDEBA933D65}"/>
               </a:ext>
             </a:extLst>
           </p:cNvPr>
@@ -5020,7 +5021,7 @@
           <p:cNvPr id="5" name="Textfeld 4">
             <a:extLst>
               <a:ext uri="{FF2B5EF4-FFF2-40B4-BE49-F238E27FC236}">
-                <a16:creationId xmlns:a16="http://schemas.microsoft.com/office/drawing/2014/main" id="{B06A0C48-E76D-198A-D1C1-84528C9F78EA}"/>
+                <a16:creationId xmlns:a16="http://schemas.microsoft.com/office/drawing/2014/main" id="{2A78E110-E32D-EA6E-2AA5-2B804F2AEAB2}"/>
               </a:ext>
             </a:extLst>
           </p:cNvPr>
@@ -5062,7 +5063,7 @@
           <p:cNvPr id="6" name="Textfeld 5">
             <a:extLst>
               <a:ext uri="{FF2B5EF4-FFF2-40B4-BE49-F238E27FC236}">
-                <a16:creationId xmlns:a16="http://schemas.microsoft.com/office/drawing/2014/main" id="{E77AA394-BE94-6566-006A-B6D755B15EE6}"/>
+                <a16:creationId xmlns:a16="http://schemas.microsoft.com/office/drawing/2014/main" id="{C472B56D-3958-0368-774D-4663373A40B0}"/>
               </a:ext>
             </a:extLst>
           </p:cNvPr>
@@ -5104,7 +5105,7 @@
           <p:cNvPr id="7" name="Textfeld 6">
             <a:extLst>
               <a:ext uri="{FF2B5EF4-FFF2-40B4-BE49-F238E27FC236}">
-                <a16:creationId xmlns:a16="http://schemas.microsoft.com/office/drawing/2014/main" id="{981E08E7-10E3-1917-C23D-5F7A5ACCCA9D}"/>
+                <a16:creationId xmlns:a16="http://schemas.microsoft.com/office/drawing/2014/main" id="{70DAFEDC-CDA2-B0A6-74A7-40E7F690807A}"/>
               </a:ext>
             </a:extLst>
           </p:cNvPr>
@@ -5146,7 +5147,7 @@
           <p:cNvPr id="8" name="Textfeld 7">
             <a:extLst>
               <a:ext uri="{FF2B5EF4-FFF2-40B4-BE49-F238E27FC236}">
-                <a16:creationId xmlns:a16="http://schemas.microsoft.com/office/drawing/2014/main" id="{EBA16320-9C71-7AD9-F6A8-C1966EC84E54}"/>
+                <a16:creationId xmlns:a16="http://schemas.microsoft.com/office/drawing/2014/main" id="{1E9D6876-1E67-D9A8-0ED5-F08A89552223}"/>
               </a:ext>
             </a:extLst>
           </p:cNvPr>
@@ -5188,7 +5189,7 @@
           <p:cNvPr id="9" name="Textfeld 8">
             <a:extLst>
               <a:ext uri="{FF2B5EF4-FFF2-40B4-BE49-F238E27FC236}">
-                <a16:creationId xmlns:a16="http://schemas.microsoft.com/office/drawing/2014/main" id="{AF218777-81A1-ACDA-E0F8-BCBC048BCA51}"/>
+                <a16:creationId xmlns:a16="http://schemas.microsoft.com/office/drawing/2014/main" id="{9569FEC8-71A1-DF5D-CFEA-038D4777DF8F}"/>
               </a:ext>
             </a:extLst>
           </p:cNvPr>
@@ -5228,7 +5229,274 @@
     </p:spTree>
     <p:extLst>
       <p:ext uri="{BB962C8B-B14F-4D97-AF65-F5344CB8AC3E}">
-        <p14:creationId xmlns:p14="http://schemas.microsoft.com/office/powerpoint/2010/main" val="485611484"/>
+        <p14:creationId xmlns:p14="http://schemas.microsoft.com/office/powerpoint/2010/main" val="1498683583"/>
+      </p:ext>
+    </p:extLst>
+  </p:cSld>
+  <p:clrMapOvr>
+    <a:masterClrMapping/>
+  </p:clrMapOvr>
+</p:sld>
+</file>
+
+<file path=ppt/slides/slide8.xml><?xml version="1.0" encoding="utf-8"?>
+<p:sld xmlns:a="http://schemas.openxmlformats.org/drawingml/2006/main" xmlns:r="http://schemas.openxmlformats.org/officeDocument/2006/relationships" xmlns:p="http://schemas.openxmlformats.org/presentationml/2006/main">
+  <p:cSld>
+    <p:spTree>
+      <p:nvGrpSpPr>
+        <p:cNvPr id="1" name=""/>
+        <p:cNvGrpSpPr/>
+        <p:nvPr/>
+      </p:nvGrpSpPr>
+      <p:grpSpPr>
+        <a:xfrm>
+          <a:off x="0" y="0"/>
+          <a:ext cx="0" cy="0"/>
+          <a:chOff x="0" y="0"/>
+          <a:chExt cx="0" cy="0"/>
+        </a:xfrm>
+      </p:grpSpPr>
+      <p:sp>
+        <p:nvSpPr>
+          <p:cNvPr id="2" name="Textfeld 1">
+            <a:extLst>
+              <a:ext uri="{FF2B5EF4-FFF2-40B4-BE49-F238E27FC236}">
+                <a16:creationId xmlns:a16="http://schemas.microsoft.com/office/drawing/2014/main" id="{00111C16-CF79-299D-569B-85EA30CA183B}"/>
+              </a:ext>
+            </a:extLst>
+          </p:cNvPr>
+          <p:cNvSpPr txBox="1"/>
+          <p:nvPr/>
+        </p:nvSpPr>
+        <p:spPr>
+          <a:xfrm>
+            <a:off x="508000" y="1905000"/>
+            <a:ext cx="2540000" cy="2540000"/>
+          </a:xfrm>
+          <a:prstGeom prst="rect">
+            <a:avLst/>
+          </a:prstGeom>
+          <a:noFill/>
+          <a:ln>
+            <a:solidFill>
+              <a:srgbClr val="BFBFBF"/>
+            </a:solidFill>
+          </a:ln>
+        </p:spPr>
+        <p:txBody>
+          <a:bodyPr vert="horz" wrap="square" rtlCol="0">
+            <a:prstTxWarp prst="textCircle">
+              <a:avLst/>
+            </a:prstTxWarp>
+            <a:noAutofit/>
+          </a:bodyPr>
+          <a:lstStyle/>
+          <a:p>
+            <a:r>
+              <a:rPr lang="en-US">
+                <a:latin typeface="Calibri" panose="020F0502020204030204" pitchFamily="34" charset="0"/>
+              </a:rPr>
+              <a:t>Line one text</a:t>
+            </a:r>
+          </a:p>
+          <a:p>
+            <a:r>
+              <a:rPr lang="en-US">
+                <a:latin typeface="Calibri" panose="020F0502020204030204" pitchFamily="34" charset="0"/>
+              </a:rPr>
+              <a:t>Line two</a:t>
+            </a:r>
+          </a:p>
+          <a:p>
+            <a:r>
+              <a:rPr lang="en-US">
+                <a:latin typeface="Calibri" panose="020F0502020204030204" pitchFamily="34" charset="0"/>
+              </a:rPr>
+              <a:t>Third line here</a:t>
+            </a:r>
+            <a:endParaRPr lang="de-DE">
+              <a:latin typeface="Calibri" panose="020F0502020204030204" pitchFamily="34" charset="0"/>
+            </a:endParaRPr>
+          </a:p>
+        </p:txBody>
+      </p:sp>
+      <p:sp>
+        <p:nvSpPr>
+          <p:cNvPr id="3" name="Textfeld 2">
+            <a:extLst>
+              <a:ext uri="{FF2B5EF4-FFF2-40B4-BE49-F238E27FC236}">
+                <a16:creationId xmlns:a16="http://schemas.microsoft.com/office/drawing/2014/main" id="{88F7DE9D-5032-6C4E-F8DD-33AA7A49068C}"/>
+              </a:ext>
+            </a:extLst>
+          </p:cNvPr>
+          <p:cNvSpPr txBox="1"/>
+          <p:nvPr/>
+        </p:nvSpPr>
+        <p:spPr>
+          <a:xfrm>
+            <a:off x="3365500" y="1905000"/>
+            <a:ext cx="2540000" cy="2540000"/>
+          </a:xfrm>
+          <a:prstGeom prst="rect">
+            <a:avLst/>
+          </a:prstGeom>
+          <a:noFill/>
+          <a:ln>
+            <a:solidFill>
+              <a:srgbClr val="BFBFBF"/>
+            </a:solidFill>
+          </a:ln>
+        </p:spPr>
+        <p:txBody>
+          <a:bodyPr vert="horz" wrap="square" rtlCol="0">
+            <a:prstTxWarp prst="textArchUp">
+              <a:avLst/>
+            </a:prstTxWarp>
+            <a:noAutofit/>
+          </a:bodyPr>
+          <a:lstStyle/>
+          <a:p>
+            <a:r>
+              <a:rPr lang="en-US">
+                <a:latin typeface="Calibri" panose="020F0502020204030204" pitchFamily="34" charset="0"/>
+              </a:rPr>
+              <a:t>Line one text</a:t>
+            </a:r>
+          </a:p>
+          <a:p>
+            <a:r>
+              <a:rPr lang="en-US">
+                <a:latin typeface="Calibri" panose="020F0502020204030204" pitchFamily="34" charset="0"/>
+              </a:rPr>
+              <a:t>Line two</a:t>
+            </a:r>
+          </a:p>
+          <a:p>
+            <a:r>
+              <a:rPr lang="en-US">
+                <a:latin typeface="Calibri" panose="020F0502020204030204" pitchFamily="34" charset="0"/>
+              </a:rPr>
+              <a:t>Third line here</a:t>
+            </a:r>
+            <a:endParaRPr lang="de-DE">
+              <a:latin typeface="Calibri" panose="020F0502020204030204" pitchFamily="34" charset="0"/>
+            </a:endParaRPr>
+          </a:p>
+        </p:txBody>
+      </p:sp>
+      <p:sp>
+        <p:nvSpPr>
+          <p:cNvPr id="4" name="Textfeld 3">
+            <a:extLst>
+              <a:ext uri="{FF2B5EF4-FFF2-40B4-BE49-F238E27FC236}">
+                <a16:creationId xmlns:a16="http://schemas.microsoft.com/office/drawing/2014/main" id="{D995B120-4791-3FED-502F-95EDA911BAA0}"/>
+              </a:ext>
+            </a:extLst>
+          </p:cNvPr>
+          <p:cNvSpPr txBox="1"/>
+          <p:nvPr/>
+        </p:nvSpPr>
+        <p:spPr>
+          <a:xfrm>
+            <a:off x="6223000" y="1905000"/>
+            <a:ext cx="2540000" cy="2540000"/>
+          </a:xfrm>
+          <a:prstGeom prst="rect">
+            <a:avLst/>
+          </a:prstGeom>
+          <a:noFill/>
+          <a:ln>
+            <a:solidFill>
+              <a:srgbClr val="BFBFBF"/>
+            </a:solidFill>
+          </a:ln>
+        </p:spPr>
+        <p:txBody>
+          <a:bodyPr vert="horz" wrap="square" rtlCol="0">
+            <a:prstTxWarp prst="textArchDown">
+              <a:avLst/>
+            </a:prstTxWarp>
+            <a:noAutofit/>
+          </a:bodyPr>
+          <a:lstStyle/>
+          <a:p>
+            <a:r>
+              <a:rPr lang="en-US">
+                <a:latin typeface="Calibri" panose="020F0502020204030204" pitchFamily="34" charset="0"/>
+              </a:rPr>
+              <a:t>Line one text</a:t>
+            </a:r>
+          </a:p>
+          <a:p>
+            <a:r>
+              <a:rPr lang="en-US">
+                <a:latin typeface="Calibri" panose="020F0502020204030204" pitchFamily="34" charset="0"/>
+              </a:rPr>
+              <a:t>Line two</a:t>
+            </a:r>
+          </a:p>
+          <a:p>
+            <a:r>
+              <a:rPr lang="en-US">
+                <a:latin typeface="Calibri" panose="020F0502020204030204" pitchFamily="34" charset="0"/>
+              </a:rPr>
+              <a:t>Third line here</a:t>
+            </a:r>
+            <a:endParaRPr lang="de-DE">
+              <a:latin typeface="Calibri" panose="020F0502020204030204" pitchFamily="34" charset="0"/>
+            </a:endParaRPr>
+          </a:p>
+        </p:txBody>
+      </p:sp>
+      <p:sp>
+        <p:nvSpPr>
+          <p:cNvPr id="5" name="Textfeld 4">
+            <a:extLst>
+              <a:ext uri="{FF2B5EF4-FFF2-40B4-BE49-F238E27FC236}">
+                <a16:creationId xmlns:a16="http://schemas.microsoft.com/office/drawing/2014/main" id="{25EB83BA-1D72-0B7C-63A6-4429AB8B29CB}"/>
+              </a:ext>
+            </a:extLst>
+          </p:cNvPr>
+          <p:cNvSpPr txBox="1"/>
+          <p:nvPr/>
+        </p:nvSpPr>
+        <p:spPr>
+          <a:xfrm>
+            <a:off x="9080500" y="1905000"/>
+            <a:ext cx="2540000" cy="2540000"/>
+          </a:xfrm>
+          <a:prstGeom prst="rect">
+            <a:avLst/>
+          </a:prstGeom>
+          <a:noFill/>
+          <a:ln>
+            <a:solidFill>
+              <a:srgbClr val="BFBFBF"/>
+            </a:solidFill>
+          </a:ln>
+        </p:spPr>
+        <p:txBody>
+          <a:bodyPr vert="horz" wrap="square" rtlCol="0">
+            <a:prstTxWarp prst="textCircle">
+              <a:avLst/>
+            </a:prstTxWarp>
+            <a:noAutofit/>
+          </a:bodyPr>
+          <a:lstStyle/>
+          <a:p>
+            <a:r>
+              <a:rPr lang="de-DE">
+                <a:latin typeface="Calibri" panose="020F0502020204030204" pitchFamily="34" charset="0"/>
+              </a:rPr>
+              <a:t>TTT TTT TTT TTT TTT TTT TTT TTT TTT TTT TTT TTT TTT TTT TTT TTT TTT TTT</a:t>
+            </a:r>
+          </a:p>
+        </p:txBody>
+      </p:sp>
+    </p:spTree>
+    <p:extLst>
+      <p:ext uri="{BB962C8B-B14F-4D97-AF65-F5344CB8AC3E}">
+        <p14:creationId xmlns:p14="http://schemas.microsoft.com/office/powerpoint/2010/main" val="3204179799"/>
       </p:ext>
     </p:extLst>
   </p:cSld>
